--- a/презентация.pptx
+++ b/презентация.pptx
@@ -1477,9 +1477,15 @@
           <a:prstGeom prst="ellipse">
             <a:avLst/>
           </a:prstGeom>
+          <a:solidFill>
+            <a:schemeClr val="accent1">
+              <a:lumMod val="60000"/>
+              <a:lumOff val="40000"/>
+            </a:schemeClr>
+          </a:solidFill>
           <a:ln>
             <a:solidFill>
-              <a:schemeClr val="bg1"/>
+              <a:schemeClr val="accent1"/>
             </a:solidFill>
           </a:ln>
         </p:spPr>
@@ -1526,9 +1532,15 @@
           <a:prstGeom prst="ellipse">
             <a:avLst/>
           </a:prstGeom>
+          <a:solidFill>
+            <a:schemeClr val="accent1">
+              <a:lumMod val="60000"/>
+              <a:lumOff val="40000"/>
+            </a:schemeClr>
+          </a:solidFill>
           <a:ln>
             <a:solidFill>
-              <a:schemeClr val="bg1"/>
+              <a:schemeClr val="accent1"/>
             </a:solidFill>
           </a:ln>
         </p:spPr>
@@ -1869,9 +1881,15 @@
           <a:prstGeom prst="ellipse">
             <a:avLst/>
           </a:prstGeom>
+          <a:solidFill>
+            <a:schemeClr val="accent1">
+              <a:lumMod val="60000"/>
+              <a:lumOff val="40000"/>
+            </a:schemeClr>
+          </a:solidFill>
           <a:ln>
             <a:solidFill>
-              <a:schemeClr val="bg1"/>
+              <a:schemeClr val="accent1"/>
             </a:solidFill>
           </a:ln>
         </p:spPr>
@@ -1951,9 +1969,15 @@
           <a:prstGeom prst="ellipse">
             <a:avLst/>
           </a:prstGeom>
+          <a:solidFill>
+            <a:schemeClr val="accent1">
+              <a:lumMod val="60000"/>
+              <a:lumOff val="40000"/>
+            </a:schemeClr>
+          </a:solidFill>
           <a:ln>
             <a:solidFill>
-              <a:schemeClr val="bg1"/>
+              <a:schemeClr val="accent1"/>
             </a:solidFill>
           </a:ln>
         </p:spPr>
@@ -2000,9 +2024,15 @@
           <a:prstGeom prst="ellipse">
             <a:avLst/>
           </a:prstGeom>
+          <a:solidFill>
+            <a:schemeClr val="accent1">
+              <a:lumMod val="60000"/>
+              <a:lumOff val="40000"/>
+            </a:schemeClr>
+          </a:solidFill>
           <a:ln>
             <a:solidFill>
-              <a:schemeClr val="bg1"/>
+              <a:schemeClr val="accent1"/>
             </a:solidFill>
           </a:ln>
         </p:spPr>
@@ -2343,9 +2373,15 @@
           <a:prstGeom prst="ellipse">
             <a:avLst/>
           </a:prstGeom>
+          <a:solidFill>
+            <a:schemeClr val="accent1">
+              <a:lumMod val="60000"/>
+              <a:lumOff val="40000"/>
+            </a:schemeClr>
+          </a:solidFill>
           <a:ln>
             <a:solidFill>
-              <a:schemeClr val="bg1"/>
+              <a:schemeClr val="accent1"/>
             </a:solidFill>
           </a:ln>
         </p:spPr>
@@ -2521,7 +2557,10 @@
             <a:avLst/>
           </a:prstGeom>
           <a:solidFill>
-            <a:srgbClr val="FFC4A3"/>
+            <a:schemeClr val="accent1">
+              <a:lumMod val="60000"/>
+              <a:lumOff val="40000"/>
+            </a:schemeClr>
           </a:solidFill>
           <a:ln>
             <a:solidFill>
@@ -2573,7 +2612,10 @@
             <a:avLst/>
           </a:prstGeom>
           <a:solidFill>
-            <a:srgbClr val="FFC4A3"/>
+            <a:schemeClr val="accent1">
+              <a:lumMod val="60000"/>
+              <a:lumOff val="40000"/>
+            </a:schemeClr>
           </a:solidFill>
           <a:ln>
             <a:solidFill>
@@ -2625,7 +2667,10 @@
             <a:avLst/>
           </a:prstGeom>
           <a:solidFill>
-            <a:srgbClr val="FFC4A3"/>
+            <a:schemeClr val="accent1">
+              <a:lumMod val="60000"/>
+              <a:lumOff val="40000"/>
+            </a:schemeClr>
           </a:solidFill>
           <a:ln>
             <a:solidFill>
@@ -3356,7 +3401,7 @@
           <p:spPr>
             <a:xfrm>
               <a:off x="2708520" y="3279033"/>
-              <a:ext cx="7959822" cy="1659134"/>
+              <a:ext cx="7959822" cy="1659135"/>
             </a:xfrm>
             <a:prstGeom prst="rect">
               <a:avLst/>
@@ -3920,7 +3965,7 @@
                 <a:ea typeface="Aptos" pitchFamily="34" charset="-122"/>
                 <a:cs typeface="Aptos" pitchFamily="34" charset="-120"/>
               </a:rPr>
-              <a:t>8</a:t>
+              <a:t>5</a:t>
             </a:r>
             <a:r>
               <a:rPr lang="en-US" sz="3600" b="1" dirty="0">
@@ -4281,7 +4326,9 @@
           </a:solidFill>
           <a:ln>
             <a:solidFill>
-              <a:schemeClr val="bg1"/>
+              <a:schemeClr val="accent2">
+                <a:lumMod val="75000"/>
+              </a:schemeClr>
             </a:solidFill>
           </a:ln>
         </p:spPr>
@@ -4333,7 +4380,9 @@
           </a:solidFill>
           <a:ln>
             <a:solidFill>
-              <a:schemeClr val="bg1"/>
+              <a:schemeClr val="accent2">
+                <a:lumMod val="75000"/>
+              </a:schemeClr>
             </a:solidFill>
           </a:ln>
         </p:spPr>
@@ -4374,7 +4423,7 @@
         </p:nvSpPr>
         <p:spPr>
           <a:xfrm>
-            <a:off x="6157504" y="5899084"/>
+            <a:off x="6242598" y="5994334"/>
             <a:ext cx="2457450" cy="2457450"/>
           </a:xfrm>
           <a:prstGeom prst="ellipse">
@@ -4385,7 +4434,9 @@
           </a:solidFill>
           <a:ln>
             <a:solidFill>
-              <a:schemeClr val="bg1"/>
+              <a:schemeClr val="accent2">
+                <a:lumMod val="75000"/>
+              </a:schemeClr>
             </a:solidFill>
           </a:ln>
         </p:spPr>
@@ -5337,7 +5388,7 @@
         </p:nvSpPr>
         <p:spPr>
           <a:xfrm>
-            <a:off x="7301218" y="2383730"/>
+            <a:off x="7534175" y="2365250"/>
             <a:ext cx="2194201" cy="1177002"/>
           </a:xfrm>
           <a:prstGeom prst="roundRect">
@@ -5363,18 +5414,6 @@
           <a:lstStyle/>
           <a:p>
             <a:pPr algn="ctr"/>
-            <a:r>
-              <a:rPr lang="en-US" sz="2400" dirty="0">
-                <a:latin typeface="Aptos Display" panose="020B0004020202020204" pitchFamily="34" charset="0"/>
-              </a:rPr>
-              <a:t>Flask-</a:t>
-            </a:r>
-            <a:r>
-              <a:rPr lang="ru-RU" sz="2400" dirty="0">
-                <a:latin typeface="Aptos Display" panose="020B0004020202020204" pitchFamily="34" charset="0"/>
-              </a:rPr>
-              <a:t>приложение</a:t>
-            </a:r>
             <a:endParaRPr lang="en-US" sz="2400" dirty="0">
               <a:latin typeface="Aptos Display" panose="020B0004020202020204" pitchFamily="34" charset="0"/>
             </a:endParaRPr>
@@ -5441,8 +5480,8 @@
         </p:nvSpPr>
         <p:spPr>
           <a:xfrm>
-            <a:off x="7301218" y="4198907"/>
-            <a:ext cx="2102096" cy="1177002"/>
+            <a:off x="7534175" y="4137221"/>
+            <a:ext cx="2194201" cy="1228573"/>
           </a:xfrm>
           <a:prstGeom prst="roundRect">
             <a:avLst>
@@ -5505,9 +5544,7 @@
           <a:noFill/>
           <a:ln>
             <a:solidFill>
-              <a:schemeClr val="accent2">
-                <a:lumMod val="75000"/>
-              </a:schemeClr>
+              <a:schemeClr val="accent1"/>
             </a:solidFill>
           </a:ln>
         </p:spPr>
@@ -5550,7 +5587,7 @@
         </p:nvCxnSpPr>
         <p:spPr>
           <a:xfrm>
-            <a:off x="6852047" y="2988390"/>
+            <a:off x="6975872" y="2988390"/>
             <a:ext cx="400050" cy="0"/>
           </a:xfrm>
           <a:prstGeom prst="straightConnector1">
@@ -5589,7 +5626,7 @@
         </p:nvCxnSpPr>
         <p:spPr>
           <a:xfrm>
-            <a:off x="8398318" y="3670934"/>
+            <a:off x="8631275" y="3652454"/>
             <a:ext cx="0" cy="413005"/>
           </a:xfrm>
           <a:prstGeom prst="straightConnector1">
@@ -5758,7 +5795,9 @@
           </a:solidFill>
           <a:ln>
             <a:solidFill>
-              <a:schemeClr val="bg1"/>
+              <a:schemeClr val="accent2">
+                <a:lumMod val="75000"/>
+              </a:schemeClr>
             </a:solidFill>
           </a:ln>
         </p:spPr>
@@ -5810,7 +5849,9 @@
           </a:solidFill>
           <a:ln>
             <a:solidFill>
-              <a:schemeClr val="bg1"/>
+              <a:schemeClr val="accent2">
+                <a:lumMod val="75000"/>
+              </a:schemeClr>
             </a:solidFill>
           </a:ln>
         </p:spPr>
@@ -5862,7 +5903,9 @@
           </a:solidFill>
           <a:ln>
             <a:solidFill>
-              <a:schemeClr val="bg1"/>
+              <a:schemeClr val="accent2">
+                <a:lumMod val="75000"/>
+              </a:schemeClr>
             </a:solidFill>
           </a:ln>
         </p:spPr>
@@ -5924,6 +5967,53 @@
               </a:rPr>
               <a:t>Nginx reverse proxy</a:t>
             </a:r>
+          </a:p>
+        </p:txBody>
+      </p:sp>
+      <p:sp>
+        <p:nvSpPr>
+          <p:cNvPr id="21" name="TextBox 20">
+            <a:extLst>
+              <a:ext uri="{FF2B5EF4-FFF2-40B4-BE49-F238E27FC236}">
+                <a16:creationId xmlns:a16="http://schemas.microsoft.com/office/drawing/2014/main" id="{83933FB6-9743-CFA5-3A35-953EAF8B2E0D}"/>
+              </a:ext>
+            </a:extLst>
+          </p:cNvPr>
+          <p:cNvSpPr txBox="1"/>
+          <p:nvPr/>
+        </p:nvSpPr>
+        <p:spPr>
+          <a:xfrm>
+            <a:off x="7617023" y="2502369"/>
+            <a:ext cx="2028503" cy="830997"/>
+          </a:xfrm>
+          <a:prstGeom prst="rect">
+            <a:avLst/>
+          </a:prstGeom>
+          <a:noFill/>
+        </p:spPr>
+        <p:txBody>
+          <a:bodyPr wrap="square" rtlCol="0">
+            <a:spAutoFit/>
+          </a:bodyPr>
+          <a:lstStyle/>
+          <a:p>
+            <a:pPr algn="ctr"/>
+            <a:r>
+              <a:rPr lang="en-US" sz="2400" dirty="0">
+                <a:latin typeface="Aptos Display" panose="020B0004020202020204" pitchFamily="34" charset="0"/>
+              </a:rPr>
+              <a:t>Flask-</a:t>
+            </a:r>
+            <a:r>
+              <a:rPr lang="ru-RU" sz="2400" dirty="0">
+                <a:latin typeface="Aptos Display" panose="020B0004020202020204" pitchFamily="34" charset="0"/>
+              </a:rPr>
+              <a:t>приложение</a:t>
+            </a:r>
+            <a:endParaRPr lang="en-US" sz="2400" dirty="0">
+              <a:latin typeface="Aptos Display" panose="020B0004020202020204" pitchFamily="34" charset="0"/>
+            </a:endParaRPr>
           </a:p>
         </p:txBody>
       </p:sp>
@@ -6528,7 +6618,10 @@
             <a:avLst/>
           </a:prstGeom>
           <a:solidFill>
-            <a:srgbClr val="FFC4A3"/>
+            <a:schemeClr val="accent1">
+              <a:lumMod val="60000"/>
+              <a:lumOff val="40000"/>
+            </a:schemeClr>
           </a:solidFill>
           <a:ln>
             <a:solidFill>
@@ -6580,7 +6673,10 @@
             <a:avLst/>
           </a:prstGeom>
           <a:solidFill>
-            <a:srgbClr val="FFC4A3"/>
+            <a:schemeClr val="accent1">
+              <a:lumMod val="60000"/>
+              <a:lumOff val="40000"/>
+            </a:schemeClr>
           </a:solidFill>
           <a:ln>
             <a:solidFill>
@@ -6632,7 +6728,10 @@
             <a:avLst/>
           </a:prstGeom>
           <a:solidFill>
-            <a:srgbClr val="FFC4A3"/>
+            <a:schemeClr val="accent1">
+              <a:lumMod val="60000"/>
+              <a:lumOff val="40000"/>
+            </a:schemeClr>
           </a:solidFill>
           <a:ln>
             <a:solidFill>
@@ -6819,8 +6918,8 @@
         </p:nvSpPr>
         <p:spPr>
           <a:xfrm>
-            <a:off x="2601057" y="2581971"/>
-            <a:ext cx="7756012" cy="1815882"/>
+            <a:off x="2506904" y="2521059"/>
+            <a:ext cx="7944317" cy="1815882"/>
           </a:xfrm>
           <a:prstGeom prst="rect">
             <a:avLst/>
@@ -6836,7 +6935,7 @@
             <a:pPr algn="ctr"/>
             <a:r>
               <a:rPr lang="ru-RU" sz="2800" dirty="0"/>
-              <a:t>Разработанная система обеспечивает изучение правил русского языка, закрепление материала с помощью тестов и контроль результатов обучения в удобном формате.</a:t>
+              <a:t>Разработанная система позволяет изучать правила русского языка, закреплять материал с помощью тестов и контролировать результаты тестирования студентов в удобном формате</a:t>
             </a:r>
             <a:endParaRPr lang="ru-RU" sz="2800" dirty="0">
               <a:latin typeface="Aptos Display" panose="020B0004020202020204" pitchFamily="34" charset="0"/>
@@ -6925,7 +7024,7 @@
         </p:nvSpPr>
         <p:spPr>
           <a:xfrm>
-            <a:off x="-1327452" y="1440477"/>
+            <a:off x="-1535859" y="2521059"/>
             <a:ext cx="2457450" cy="2457450"/>
           </a:xfrm>
           <a:prstGeom prst="ellipse">
@@ -6936,7 +7035,9 @@
           </a:solidFill>
           <a:ln>
             <a:solidFill>
-              <a:schemeClr val="bg1"/>
+              <a:schemeClr val="accent2">
+                <a:lumMod val="75000"/>
+              </a:schemeClr>
             </a:solidFill>
           </a:ln>
         </p:spPr>
@@ -6977,7 +7078,7 @@
         </p:nvSpPr>
         <p:spPr>
           <a:xfrm>
-            <a:off x="1451732" y="5476721"/>
+            <a:off x="2863215" y="5857721"/>
             <a:ext cx="2457450" cy="2457450"/>
           </a:xfrm>
           <a:prstGeom prst="ellipse">
@@ -6988,7 +7089,9 @@
           </a:solidFill>
           <a:ln>
             <a:solidFill>
-              <a:schemeClr val="bg1"/>
+              <a:schemeClr val="accent2">
+                <a:lumMod val="75000"/>
+              </a:schemeClr>
             </a:solidFill>
           </a:ln>
         </p:spPr>
@@ -7029,7 +7132,7 @@
         </p:nvSpPr>
         <p:spPr>
           <a:xfrm>
-            <a:off x="11303643" y="2310378"/>
+            <a:off x="11163300" y="1034795"/>
             <a:ext cx="2457450" cy="2457450"/>
           </a:xfrm>
           <a:prstGeom prst="ellipse">
@@ -7040,7 +7143,9 @@
           </a:solidFill>
           <a:ln>
             <a:solidFill>
-              <a:schemeClr val="bg1"/>
+              <a:schemeClr val="accent2">
+                <a:lumMod val="75000"/>
+              </a:schemeClr>
             </a:solidFill>
           </a:ln>
         </p:spPr>

--- a/презентация.pptx
+++ b/презентация.pptx
@@ -5,7 +5,7 @@
     <p:sldMasterId id="2147483648" r:id="rId1"/>
   </p:sldMasterIdLst>
   <p:notesMasterIdLst>
-    <p:notesMasterId r:id="rId12"/>
+    <p:notesMasterId r:id="rId11"/>
   </p:notesMasterIdLst>
   <p:sldIdLst>
     <p:sldId id="256" r:id="rId2"/>
@@ -14,10 +14,9 @@
     <p:sldId id="270" r:id="rId5"/>
     <p:sldId id="276" r:id="rId6"/>
     <p:sldId id="269" r:id="rId7"/>
-    <p:sldId id="275" r:id="rId8"/>
-    <p:sldId id="272" r:id="rId9"/>
-    <p:sldId id="273" r:id="rId10"/>
-    <p:sldId id="274" r:id="rId11"/>
+    <p:sldId id="272" r:id="rId8"/>
+    <p:sldId id="273" r:id="rId9"/>
+    <p:sldId id="274" r:id="rId10"/>
   </p:sldIdLst>
   <p:sldSz cx="12192000" cy="6858000"/>
   <p:notesSz cx="6858000" cy="12192000"/>
@@ -330,90 +329,6 @@
 </p:notes>
 </file>
 
-<file path=ppt/notesSlides/notesSlide10.xml><?xml version="1.0" encoding="utf-8"?>
-<p:notes xmlns:a="http://schemas.openxmlformats.org/drawingml/2006/main" xmlns:r="http://schemas.openxmlformats.org/officeDocument/2006/relationships" xmlns:p="http://schemas.openxmlformats.org/presentationml/2006/main">
-  <p:cSld>
-    <p:spTree>
-      <p:nvGrpSpPr>
-        <p:cNvPr id="1" name=""/>
-        <p:cNvGrpSpPr/>
-        <p:nvPr/>
-      </p:nvGrpSpPr>
-      <p:grpSpPr>
-        <a:xfrm>
-          <a:off x="0" y="0"/>
-          <a:ext cx="0" cy="0"/>
-          <a:chOff x="0" y="0"/>
-          <a:chExt cx="0" cy="0"/>
-        </a:xfrm>
-      </p:grpSpPr>
-      <p:sp>
-        <p:nvSpPr>
-          <p:cNvPr id="2" name="Slide Image Placeholder 1"/>
-          <p:cNvSpPr>
-            <a:spLocks noGrp="1" noRot="1" noChangeAspect="1"/>
-          </p:cNvSpPr>
-          <p:nvPr>
-            <p:ph type="sldImg"/>
-          </p:nvPr>
-        </p:nvSpPr>
-        <p:spPr/>
-      </p:sp>
-      <p:sp>
-        <p:nvSpPr>
-          <p:cNvPr id="3" name="Notes Placeholder 2"/>
-          <p:cNvSpPr>
-            <a:spLocks noGrp="1"/>
-          </p:cNvSpPr>
-          <p:nvPr>
-            <p:ph type="body" idx="1"/>
-          </p:nvPr>
-        </p:nvSpPr>
-        <p:spPr/>
-        <p:txBody>
-          <a:bodyPr/>
-          <a:lstStyle/>
-          <a:p>
-            <a:endParaRPr lang="en-US" dirty="0"/>
-          </a:p>
-        </p:txBody>
-      </p:sp>
-      <p:sp>
-        <p:nvSpPr>
-          <p:cNvPr id="4" name="Slide Number Placeholder 3"/>
-          <p:cNvSpPr>
-            <a:spLocks noGrp="1"/>
-          </p:cNvSpPr>
-          <p:nvPr>
-            <p:ph type="sldNum" sz="quarter" idx="10"/>
-          </p:nvPr>
-        </p:nvSpPr>
-        <p:spPr/>
-        <p:txBody>
-          <a:bodyPr/>
-          <a:lstStyle/>
-          <a:p>
-            <a:fld id="{F7021451-1387-4CA6-816F-3879F97B5CBC}" type="slidenum">
-              <a:rPr lang="en-US"/>
-              <a:t>10</a:t>
-            </a:fld>
-            <a:endParaRPr lang="en-US"/>
-          </a:p>
-        </p:txBody>
-      </p:sp>
-    </p:spTree>
-    <p:extLst>
-      <p:ext uri="{BB962C8B-B14F-4D97-AF65-F5344CB8AC3E}">
-        <p14:creationId xmlns:p14="http://schemas.microsoft.com/office/powerpoint/2010/main" val="2585686344"/>
-      </p:ext>
-    </p:extLst>
-  </p:cSld>
-  <p:clrMapOvr>
-    <a:masterClrMapping/>
-  </p:clrMapOvr>
-</p:notes>
-</file>
-
 <file path=ppt/notesSlides/notesSlide2.xml><?xml version="1.0" encoding="utf-8"?>
 <p:notes xmlns:a="http://schemas.openxmlformats.org/drawingml/2006/main" xmlns:r="http://schemas.openxmlformats.org/officeDocument/2006/relationships" xmlns:p="http://schemas.openxmlformats.org/presentationml/2006/main">
   <p:cSld>
@@ -908,7 +823,7 @@
     </p:spTree>
     <p:extLst>
       <p:ext uri="{BB962C8B-B14F-4D97-AF65-F5344CB8AC3E}">
-        <p14:creationId xmlns:p14="http://schemas.microsoft.com/office/powerpoint/2010/main" val="3909999831"/>
+        <p14:creationId xmlns:p14="http://schemas.microsoft.com/office/powerpoint/2010/main" val="3867864348"/>
       </p:ext>
     </p:extLst>
   </p:cSld>
@@ -992,7 +907,7 @@
     </p:spTree>
     <p:extLst>
       <p:ext uri="{BB962C8B-B14F-4D97-AF65-F5344CB8AC3E}">
-        <p14:creationId xmlns:p14="http://schemas.microsoft.com/office/powerpoint/2010/main" val="3867864348"/>
+        <p14:creationId xmlns:p14="http://schemas.microsoft.com/office/powerpoint/2010/main" val="2581315004"/>
       </p:ext>
     </p:extLst>
   </p:cSld>
@@ -1076,7 +991,7 @@
     </p:spTree>
     <p:extLst>
       <p:ext uri="{BB962C8B-B14F-4D97-AF65-F5344CB8AC3E}">
-        <p14:creationId xmlns:p14="http://schemas.microsoft.com/office/powerpoint/2010/main" val="2581315004"/>
+        <p14:creationId xmlns:p14="http://schemas.microsoft.com/office/powerpoint/2010/main" val="2585686344"/>
       </p:ext>
     </p:extLst>
   </p:cSld>
@@ -1924,503 +1839,6 @@
 </p:sld>
 </file>
 
-<file path=ppt/slides/slide10.xml><?xml version="1.0" encoding="utf-8"?>
-<p:sld xmlns:a="http://schemas.openxmlformats.org/drawingml/2006/main" xmlns:r="http://schemas.openxmlformats.org/officeDocument/2006/relationships" xmlns:p="http://schemas.openxmlformats.org/presentationml/2006/main">
-  <p:cSld>
-    <p:bg>
-      <p:bgPr>
-        <a:solidFill>
-          <a:srgbClr val="FFC4A3"/>
-        </a:solidFill>
-        <a:effectLst/>
-      </p:bgPr>
-    </p:bg>
-    <p:spTree>
-      <p:nvGrpSpPr>
-        <p:cNvPr id="1" name=""/>
-        <p:cNvGrpSpPr/>
-        <p:nvPr/>
-      </p:nvGrpSpPr>
-      <p:grpSpPr>
-        <a:xfrm>
-          <a:off x="0" y="0"/>
-          <a:ext cx="0" cy="0"/>
-          <a:chOff x="0" y="0"/>
-          <a:chExt cx="0" cy="0"/>
-        </a:xfrm>
-      </p:grpSpPr>
-      <p:sp>
-        <p:nvSpPr>
-          <p:cNvPr id="32" name="Овал 31">
-            <a:extLst>
-              <a:ext uri="{FF2B5EF4-FFF2-40B4-BE49-F238E27FC236}">
-                <a16:creationId xmlns:a16="http://schemas.microsoft.com/office/drawing/2014/main" id="{C3CD927C-0D78-6C61-3DA1-D0128CF97D03}"/>
-              </a:ext>
-            </a:extLst>
-          </p:cNvPr>
-          <p:cNvSpPr/>
-          <p:nvPr/>
-        </p:nvSpPr>
-        <p:spPr>
-          <a:xfrm>
-            <a:off x="1028700" y="5937691"/>
-            <a:ext cx="2457450" cy="2457450"/>
-          </a:xfrm>
-          <a:prstGeom prst="ellipse">
-            <a:avLst/>
-          </a:prstGeom>
-          <a:solidFill>
-            <a:schemeClr val="accent1">
-              <a:lumMod val="60000"/>
-              <a:lumOff val="40000"/>
-            </a:schemeClr>
-          </a:solidFill>
-          <a:ln>
-            <a:solidFill>
-              <a:schemeClr val="accent1"/>
-            </a:solidFill>
-          </a:ln>
-        </p:spPr>
-        <p:style>
-          <a:lnRef idx="2">
-            <a:schemeClr val="dk1"/>
-          </a:lnRef>
-          <a:fillRef idx="1">
-            <a:schemeClr val="lt1"/>
-          </a:fillRef>
-          <a:effectRef idx="0">
-            <a:schemeClr val="dk1"/>
-          </a:effectRef>
-          <a:fontRef idx="minor">
-            <a:schemeClr val="dk1"/>
-          </a:fontRef>
-        </p:style>
-        <p:txBody>
-          <a:bodyPr rtlCol="0" anchor="ctr"/>
-          <a:lstStyle/>
-          <a:p>
-            <a:pPr algn="ctr"/>
-            <a:endParaRPr lang="ru-RU"/>
-          </a:p>
-        </p:txBody>
-      </p:sp>
-      <p:sp>
-        <p:nvSpPr>
-          <p:cNvPr id="30" name="Овал 29">
-            <a:extLst>
-              <a:ext uri="{FF2B5EF4-FFF2-40B4-BE49-F238E27FC236}">
-                <a16:creationId xmlns:a16="http://schemas.microsoft.com/office/drawing/2014/main" id="{56005B72-5DFD-0EEB-EC2C-30587A94F227}"/>
-              </a:ext>
-            </a:extLst>
-          </p:cNvPr>
-          <p:cNvSpPr/>
-          <p:nvPr/>
-        </p:nvSpPr>
-        <p:spPr>
-          <a:xfrm>
-            <a:off x="-828675" y="-611558"/>
-            <a:ext cx="2457450" cy="2457450"/>
-          </a:xfrm>
-          <a:prstGeom prst="ellipse">
-            <a:avLst/>
-          </a:prstGeom>
-          <a:solidFill>
-            <a:schemeClr val="accent1">
-              <a:lumMod val="60000"/>
-              <a:lumOff val="40000"/>
-            </a:schemeClr>
-          </a:solidFill>
-          <a:ln>
-            <a:solidFill>
-              <a:schemeClr val="accent1"/>
-            </a:solidFill>
-          </a:ln>
-        </p:spPr>
-        <p:style>
-          <a:lnRef idx="2">
-            <a:schemeClr val="dk1"/>
-          </a:lnRef>
-          <a:fillRef idx="1">
-            <a:schemeClr val="lt1"/>
-          </a:fillRef>
-          <a:effectRef idx="0">
-            <a:schemeClr val="dk1"/>
-          </a:effectRef>
-          <a:fontRef idx="minor">
-            <a:schemeClr val="dk1"/>
-          </a:fontRef>
-        </p:style>
-        <p:txBody>
-          <a:bodyPr rtlCol="0" anchor="ctr"/>
-          <a:lstStyle/>
-          <a:p>
-            <a:pPr algn="ctr"/>
-            <a:endParaRPr lang="ru-RU"/>
-          </a:p>
-        </p:txBody>
-      </p:sp>
-      <p:sp>
-        <p:nvSpPr>
-          <p:cNvPr id="3" name="Text 1"/>
-          <p:cNvSpPr/>
-          <p:nvPr/>
-        </p:nvSpPr>
-        <p:spPr>
-          <a:xfrm>
-            <a:off x="2053689" y="468534"/>
-            <a:ext cx="8084620" cy="1401510"/>
-          </a:xfrm>
-          <a:prstGeom prst="rect">
-            <a:avLst/>
-          </a:prstGeom>
-          <a:noFill/>
-          <a:ln/>
-        </p:spPr>
-        <p:txBody>
-          <a:bodyPr wrap="square" lIns="0" tIns="0" rIns="0" bIns="0" rtlCol="0" anchor="ctr"/>
-          <a:lstStyle/>
-          <a:p>
-            <a:pPr marL="0" indent="0" algn="ctr">
-              <a:buNone/>
-            </a:pPr>
-            <a:r>
-              <a:rPr lang="ru-RU" sz="1600" b="1" dirty="0"/>
-              <a:t>ФЕДЕРАЛЬНОЕ ГОСУДАРСТВЕННОЕ БЮДЖЕТНОЕ ОБРАЗОВАТЕЛЬНОЕ УЧРЕЖДЕНИЕ ВЫСШЕГО ОБРАЗОВАНИЯ </a:t>
-            </a:r>
-            <a:br>
-              <a:rPr lang="ru-RU" sz="1600" b="1" dirty="0"/>
-            </a:br>
-            <a:r>
-              <a:rPr lang="ru-RU" sz="1600" b="1" dirty="0"/>
-              <a:t>«САНКТ-ПЕТЕРБУРГСКИЙ ГОСУДАРСТВЕННЫЙ УНИВЕРСИТЕТ ТЕЛЕКОММУНИКАЦИЙ ИМ. ПРОФ. М.А. БОНЧ-БРУЕВИЧА» </a:t>
-            </a:r>
-            <a:br>
-              <a:rPr lang="ru-RU" sz="1600" b="1" dirty="0"/>
-            </a:br>
-            <a:r>
-              <a:rPr lang="ru-RU" sz="1600" b="1" dirty="0"/>
-              <a:t>(СПбГУТ) </a:t>
-            </a:r>
-            <a:br>
-              <a:rPr lang="ru-RU" sz="1600" b="1" dirty="0"/>
-            </a:br>
-            <a:br>
-              <a:rPr lang="ru-RU" sz="1600" b="1" dirty="0"/>
-            </a:br>
-            <a:r>
-              <a:rPr lang="ru-RU" sz="1600" b="1" dirty="0"/>
-              <a:t>АРХАНГЕЛЬСКИЙ КОЛЛЕДЖ ТЕЛЕКОММУНИКАЦИЙ </a:t>
-            </a:r>
-            <a:br>
-              <a:rPr lang="ru-RU" sz="1600" b="1" dirty="0"/>
-            </a:br>
-            <a:r>
-              <a:rPr lang="ru-RU" sz="1600" b="1" dirty="0"/>
-              <a:t>ИМ. Б.Л. РОЗИНГА (ФИЛИАЛ) СПбГУТ </a:t>
-            </a:r>
-            <a:br>
-              <a:rPr lang="ru-RU" sz="1600" b="1" dirty="0"/>
-            </a:br>
-            <a:r>
-              <a:rPr lang="ru-RU" sz="1600" b="1" dirty="0"/>
-              <a:t>(АКТ (ф) СПбГУТ) </a:t>
-            </a:r>
-            <a:endParaRPr lang="en-US" sz="1600" b="1" dirty="0"/>
-          </a:p>
-        </p:txBody>
-      </p:sp>
-      <p:sp>
-        <p:nvSpPr>
-          <p:cNvPr id="24" name="TextBox 23">
-            <a:extLst>
-              <a:ext uri="{FF2B5EF4-FFF2-40B4-BE49-F238E27FC236}">
-                <a16:creationId xmlns:a16="http://schemas.microsoft.com/office/drawing/2014/main" id="{28129A70-40A9-97E6-8158-A8661A658A4D}"/>
-              </a:ext>
-            </a:extLst>
-          </p:cNvPr>
-          <p:cNvSpPr txBox="1"/>
-          <p:nvPr/>
-        </p:nvSpPr>
-        <p:spPr>
-          <a:xfrm>
-            <a:off x="1831648" y="2473076"/>
-            <a:ext cx="8528703" cy="461665"/>
-          </a:xfrm>
-          <a:prstGeom prst="rect">
-            <a:avLst/>
-          </a:prstGeom>
-          <a:noFill/>
-        </p:spPr>
-        <p:txBody>
-          <a:bodyPr wrap="square" rtlCol="0">
-            <a:spAutoFit/>
-          </a:bodyPr>
-          <a:lstStyle/>
-          <a:p>
-            <a:pPr algn="ctr"/>
-            <a:r>
-              <a:rPr lang="ru-RU" sz="2400" b="1" dirty="0">
-                <a:ea typeface="Verdana" panose="020B0604030504040204" pitchFamily="34" charset="0"/>
-              </a:rPr>
-              <a:t>ДИПЛОМНЫЙ ПРОЕКТ</a:t>
-            </a:r>
-            <a:endParaRPr lang="ru-RU" sz="2400" b="1" dirty="0"/>
-          </a:p>
-        </p:txBody>
-      </p:sp>
-      <p:sp>
-        <p:nvSpPr>
-          <p:cNvPr id="25" name="TextBox 24">
-            <a:extLst>
-              <a:ext uri="{FF2B5EF4-FFF2-40B4-BE49-F238E27FC236}">
-                <a16:creationId xmlns:a16="http://schemas.microsoft.com/office/drawing/2014/main" id="{F508F988-A29F-A789-2B8F-5F13D806E266}"/>
-              </a:ext>
-            </a:extLst>
-          </p:cNvPr>
-          <p:cNvSpPr txBox="1"/>
-          <p:nvPr/>
-        </p:nvSpPr>
-        <p:spPr>
-          <a:xfrm>
-            <a:off x="-1609725" y="3264191"/>
-            <a:ext cx="14592300" cy="830997"/>
-          </a:xfrm>
-          <a:prstGeom prst="rect">
-            <a:avLst/>
-          </a:prstGeom>
-          <a:noFill/>
-        </p:spPr>
-        <p:txBody>
-          <a:bodyPr wrap="square" rtlCol="0">
-            <a:spAutoFit/>
-          </a:bodyPr>
-          <a:lstStyle/>
-          <a:p>
-            <a:pPr algn="ctr"/>
-            <a:r>
-              <a:rPr lang="ru-RU" sz="2400" b="1" dirty="0">
-                <a:ea typeface="Verdana" panose="020B0604030504040204" pitchFamily="34" charset="0"/>
-              </a:rPr>
-              <a:t>РАЗРАБОТКА ИНФОРМАЦИОННОЙ СИСТЕМЫ</a:t>
-            </a:r>
-          </a:p>
-          <a:p>
-            <a:pPr algn="ctr"/>
-            <a:r>
-              <a:rPr lang="ru-RU" sz="2400" b="1" dirty="0">
-                <a:ea typeface="Verdana" panose="020B0604030504040204" pitchFamily="34" charset="0"/>
-              </a:rPr>
-              <a:t>ДЛЯ ИЗУЧЕНИЯ ПРАВИЛ РУССКОГО ЯЗЫКА «ГРАММАРИУМ»</a:t>
-            </a:r>
-            <a:endParaRPr lang="ru-RU" sz="2400" b="1" dirty="0"/>
-          </a:p>
-        </p:txBody>
-      </p:sp>
-      <p:sp>
-        <p:nvSpPr>
-          <p:cNvPr id="26" name="TextBox 25">
-            <a:extLst>
-              <a:ext uri="{FF2B5EF4-FFF2-40B4-BE49-F238E27FC236}">
-                <a16:creationId xmlns:a16="http://schemas.microsoft.com/office/drawing/2014/main" id="{656445F3-FE04-ED86-447F-D33A81725C7D}"/>
-              </a:ext>
-            </a:extLst>
-          </p:cNvPr>
-          <p:cNvSpPr txBox="1"/>
-          <p:nvPr/>
-        </p:nvSpPr>
-        <p:spPr>
-          <a:xfrm>
-            <a:off x="299100" y="4672584"/>
-            <a:ext cx="6215999" cy="584775"/>
-          </a:xfrm>
-          <a:prstGeom prst="rect">
-            <a:avLst/>
-          </a:prstGeom>
-          <a:noFill/>
-        </p:spPr>
-        <p:txBody>
-          <a:bodyPr wrap="square" rtlCol="0">
-            <a:spAutoFit/>
-          </a:bodyPr>
-          <a:lstStyle/>
-          <a:p>
-            <a:r>
-              <a:rPr lang="ru-RU" sz="1600" b="1" dirty="0">
-                <a:ea typeface="Verdana" panose="020B0604030504040204" pitchFamily="34" charset="0"/>
-              </a:rPr>
-              <a:t>Дипломник </a:t>
-            </a:r>
-          </a:p>
-          <a:p>
-            <a:r>
-              <a:rPr lang="ru-RU" sz="1600" dirty="0" err="1">
-                <a:ea typeface="Verdana" panose="020B0604030504040204" pitchFamily="34" charset="0"/>
-              </a:rPr>
-              <a:t>Вепрёв</a:t>
-            </a:r>
-            <a:r>
-              <a:rPr lang="ru-RU" sz="1600" dirty="0">
-                <a:ea typeface="Verdana" panose="020B0604030504040204" pitchFamily="34" charset="0"/>
-              </a:rPr>
-              <a:t> Александр Михайлович </a:t>
-            </a:r>
-            <a:endParaRPr lang="ru-RU" sz="1600" dirty="0"/>
-          </a:p>
-        </p:txBody>
-      </p:sp>
-      <p:sp>
-        <p:nvSpPr>
-          <p:cNvPr id="28" name="TextBox 27">
-            <a:extLst>
-              <a:ext uri="{FF2B5EF4-FFF2-40B4-BE49-F238E27FC236}">
-                <a16:creationId xmlns:a16="http://schemas.microsoft.com/office/drawing/2014/main" id="{674FFBA4-F36A-A395-8992-3C4F95CECFA7}"/>
-              </a:ext>
-            </a:extLst>
-          </p:cNvPr>
-          <p:cNvSpPr txBox="1"/>
-          <p:nvPr/>
-        </p:nvSpPr>
-        <p:spPr>
-          <a:xfrm>
-            <a:off x="299100" y="5352916"/>
-            <a:ext cx="5888052" cy="584775"/>
-          </a:xfrm>
-          <a:prstGeom prst="rect">
-            <a:avLst/>
-          </a:prstGeom>
-          <a:noFill/>
-        </p:spPr>
-        <p:txBody>
-          <a:bodyPr wrap="square" rtlCol="0">
-            <a:spAutoFit/>
-          </a:bodyPr>
-          <a:lstStyle/>
-          <a:p>
-            <a:r>
-              <a:rPr lang="ru-RU" sz="1600" b="1" dirty="0">
-                <a:ea typeface="Verdana" panose="020B0604030504040204" pitchFamily="34" charset="0"/>
-              </a:rPr>
-              <a:t>Дипломный руководитель</a:t>
-            </a:r>
-          </a:p>
-          <a:p>
-            <a:r>
-              <a:rPr lang="ru-RU" sz="1600" dirty="0">
-                <a:ea typeface="Verdana" panose="020B0604030504040204" pitchFamily="34" charset="0"/>
-              </a:rPr>
-              <a:t>Старостина Вера Валерьевна</a:t>
-            </a:r>
-            <a:endParaRPr lang="ru-RU" sz="1600" dirty="0"/>
-          </a:p>
-        </p:txBody>
-      </p:sp>
-      <p:sp>
-        <p:nvSpPr>
-          <p:cNvPr id="29" name="TextBox 28">
-            <a:extLst>
-              <a:ext uri="{FF2B5EF4-FFF2-40B4-BE49-F238E27FC236}">
-                <a16:creationId xmlns:a16="http://schemas.microsoft.com/office/drawing/2014/main" id="{B1C9ECBD-0FBE-9B97-3B54-1F1CB1DDAD32}"/>
-              </a:ext>
-            </a:extLst>
-          </p:cNvPr>
-          <p:cNvSpPr txBox="1"/>
-          <p:nvPr/>
-        </p:nvSpPr>
-        <p:spPr>
-          <a:xfrm>
-            <a:off x="3151975" y="6426436"/>
-            <a:ext cx="5888052" cy="338554"/>
-          </a:xfrm>
-          <a:prstGeom prst="rect">
-            <a:avLst/>
-          </a:prstGeom>
-          <a:noFill/>
-        </p:spPr>
-        <p:txBody>
-          <a:bodyPr wrap="square" rtlCol="0">
-            <a:spAutoFit/>
-          </a:bodyPr>
-          <a:lstStyle/>
-          <a:p>
-            <a:pPr algn="ctr"/>
-            <a:r>
-              <a:rPr lang="ru-RU" sz="1600" dirty="0">
-                <a:ea typeface="Verdana" panose="020B0604030504040204" pitchFamily="34" charset="0"/>
-              </a:rPr>
-              <a:t>Архангельск 2026</a:t>
-            </a:r>
-            <a:endParaRPr lang="ru-RU" sz="1600" dirty="0"/>
-          </a:p>
-        </p:txBody>
-      </p:sp>
-      <p:sp>
-        <p:nvSpPr>
-          <p:cNvPr id="31" name="Овал 30">
-            <a:extLst>
-              <a:ext uri="{FF2B5EF4-FFF2-40B4-BE49-F238E27FC236}">
-                <a16:creationId xmlns:a16="http://schemas.microsoft.com/office/drawing/2014/main" id="{5AE369CE-41EA-1633-FD0D-238019E1BEAC}"/>
-              </a:ext>
-            </a:extLst>
-          </p:cNvPr>
-          <p:cNvSpPr/>
-          <p:nvPr/>
-        </p:nvSpPr>
-        <p:spPr>
-          <a:xfrm>
-            <a:off x="10963275" y="2604460"/>
-            <a:ext cx="2457450" cy="2457450"/>
-          </a:xfrm>
-          <a:prstGeom prst="ellipse">
-            <a:avLst/>
-          </a:prstGeom>
-          <a:solidFill>
-            <a:schemeClr val="accent1">
-              <a:lumMod val="60000"/>
-              <a:lumOff val="40000"/>
-            </a:schemeClr>
-          </a:solidFill>
-          <a:ln>
-            <a:solidFill>
-              <a:schemeClr val="accent1"/>
-            </a:solidFill>
-          </a:ln>
-        </p:spPr>
-        <p:style>
-          <a:lnRef idx="2">
-            <a:schemeClr val="dk1"/>
-          </a:lnRef>
-          <a:fillRef idx="1">
-            <a:schemeClr val="lt1"/>
-          </a:fillRef>
-          <a:effectRef idx="0">
-            <a:schemeClr val="dk1"/>
-          </a:effectRef>
-          <a:fontRef idx="minor">
-            <a:schemeClr val="dk1"/>
-          </a:fontRef>
-        </p:style>
-        <p:txBody>
-          <a:bodyPr rtlCol="0" anchor="ctr"/>
-          <a:lstStyle/>
-          <a:p>
-            <a:pPr algn="ctr"/>
-            <a:endParaRPr lang="ru-RU"/>
-          </a:p>
-        </p:txBody>
-      </p:sp>
-    </p:spTree>
-    <p:extLst>
-      <p:ext uri="{BB962C8B-B14F-4D97-AF65-F5344CB8AC3E}">
-        <p14:creationId xmlns:p14="http://schemas.microsoft.com/office/powerpoint/2010/main" val="4250463745"/>
-      </p:ext>
-    </p:extLst>
-  </p:cSld>
-  <p:clrMapOvr>
-    <a:masterClrMapping/>
-  </p:clrMapOvr>
-</p:sld>
-</file>
-
 <file path=ppt/slides/slide2.xml><?xml version="1.0" encoding="utf-8"?>
 <p:sld xmlns:a="http://schemas.openxmlformats.org/drawingml/2006/main" xmlns:r="http://schemas.openxmlformats.org/officeDocument/2006/relationships" xmlns:p="http://schemas.openxmlformats.org/presentationml/2006/main">
   <p:cSld name="Slide 2">
@@ -3523,8 +2941,8 @@
         </p:nvSpPr>
         <p:spPr>
           <a:xfrm>
-            <a:off x="2630566" y="2571982"/>
-            <a:ext cx="7696991" cy="1714036"/>
+            <a:off x="2004551" y="2483124"/>
+            <a:ext cx="8182592" cy="2141689"/>
           </a:xfrm>
           <a:prstGeom prst="roundRect">
             <a:avLst>
@@ -3569,8 +2987,8 @@
         </p:nvSpPr>
         <p:spPr>
           <a:xfrm>
-            <a:off x="3255837" y="3034413"/>
-            <a:ext cx="6446451" cy="954107"/>
+            <a:off x="2510825" y="2571982"/>
+            <a:ext cx="7170044" cy="1894621"/>
           </a:xfrm>
           <a:prstGeom prst="rect">
             <a:avLst/>
@@ -3583,31 +3001,35 @@
           </a:bodyPr>
           <a:lstStyle/>
           <a:p>
-            <a:pPr algn="ctr"/>
+            <a:pPr indent="450215" algn="ctr">
+              <a:lnSpc>
+                <a:spcPct val="150000"/>
+              </a:lnSpc>
+            </a:pPr>
             <a:r>
-              <a:rPr lang="ru-RU" sz="2800" b="0" i="0" dirty="0">
+              <a:rPr lang="ru-RU" sz="2000" kern="100" dirty="0">
                 <a:effectLst/>
-                <a:latin typeface="Aptos Display" panose="020B0004020202020204" pitchFamily="34" charset="0"/>
+                <a:ea typeface="Calibri" panose="020F0502020204030204" pitchFamily="34" charset="0"/>
+                <a:cs typeface="Times New Roman" panose="02020603050405020304" pitchFamily="18" charset="0"/>
               </a:rPr>
-              <a:t>Разработать информационную систему «</a:t>
+              <a:t>Целью дипломного проектирования является разработка информационной системы «</a:t>
             </a:r>
             <a:r>
-              <a:rPr lang="ru-RU" sz="2800" b="0" i="0" dirty="0" err="1">
+              <a:rPr lang="ru-RU" sz="2000" kern="100" dirty="0" err="1">
                 <a:effectLst/>
-                <a:latin typeface="Aptos Display" panose="020B0004020202020204" pitchFamily="34" charset="0"/>
+                <a:ea typeface="Calibri" panose="020F0502020204030204" pitchFamily="34" charset="0"/>
+                <a:cs typeface="Times New Roman" panose="02020603050405020304" pitchFamily="18" charset="0"/>
               </a:rPr>
               <a:t>Граммариум</a:t>
             </a:r>
             <a:r>
-              <a:rPr lang="ru-RU" sz="2800" b="0" i="0" dirty="0">
+              <a:rPr lang="ru-RU" sz="2000" kern="100" dirty="0">
                 <a:effectLst/>
-                <a:latin typeface="Aptos Display" panose="020B0004020202020204" pitchFamily="34" charset="0"/>
+                <a:ea typeface="Calibri" panose="020F0502020204030204" pitchFamily="34" charset="0"/>
+                <a:cs typeface="Times New Roman" panose="02020603050405020304" pitchFamily="18" charset="0"/>
               </a:rPr>
-              <a:t>»</a:t>
+              <a:t>», предназначенной для изучения правил русского языка, прохождения тестов и контроля успеваемости студентов</a:t>
             </a:r>
-            <a:endParaRPr lang="ru-RU" sz="2800" dirty="0">
-              <a:latin typeface="Aptos Display" panose="020B0004020202020204" pitchFamily="34" charset="0"/>
-            </a:endParaRPr>
           </a:p>
         </p:txBody>
       </p:sp>
@@ -5223,863 +4645,6 @@
         </p:nvSpPr>
         <p:spPr>
           <a:xfrm>
-            <a:off x="291465" y="265177"/>
-            <a:ext cx="5029200" cy="219456"/>
-          </a:xfrm>
-          <a:prstGeom prst="rect">
-            <a:avLst/>
-          </a:prstGeom>
-          <a:noFill/>
-          <a:ln/>
-        </p:spPr>
-        <p:txBody>
-          <a:bodyPr wrap="square" lIns="0" tIns="0" rIns="0" bIns="0" rtlCol="0" anchor="ctr"/>
-          <a:lstStyle/>
-          <a:p>
-            <a:pPr marL="0" indent="0">
-              <a:buNone/>
-            </a:pPr>
-            <a:r>
-              <a:rPr lang="ru-RU" sz="3200" b="1" dirty="0">
-                <a:latin typeface="Aptos Display" pitchFamily="34" charset="0"/>
-              </a:rPr>
-              <a:t>АРХИТЕКТУРА СИСТЕМЫ</a:t>
-            </a:r>
-            <a:endParaRPr lang="en-US" sz="3200" b="1" dirty="0"/>
-          </a:p>
-        </p:txBody>
-      </p:sp>
-      <p:sp>
-        <p:nvSpPr>
-          <p:cNvPr id="4" name="Text 34">
-            <a:extLst>
-              <a:ext uri="{FF2B5EF4-FFF2-40B4-BE49-F238E27FC236}">
-                <a16:creationId xmlns:a16="http://schemas.microsoft.com/office/drawing/2014/main" id="{A97C67DA-D17A-23F7-110D-99A7186F502E}"/>
-              </a:ext>
-            </a:extLst>
-          </p:cNvPr>
-          <p:cNvSpPr/>
-          <p:nvPr/>
-        </p:nvSpPr>
-        <p:spPr>
-          <a:xfrm>
-            <a:off x="10829925" y="6234682"/>
-            <a:ext cx="1162050" cy="544449"/>
-          </a:xfrm>
-          <a:prstGeom prst="rect">
-            <a:avLst/>
-          </a:prstGeom>
-          <a:noFill/>
-          <a:ln/>
-        </p:spPr>
-        <p:txBody>
-          <a:bodyPr wrap="square" lIns="0" tIns="0" rIns="0" bIns="0" rtlCol="0" anchor="ctr"/>
-          <a:lstStyle/>
-          <a:p>
-            <a:pPr marL="0" indent="0" algn="r">
-              <a:buNone/>
-            </a:pPr>
-            <a:r>
-              <a:rPr lang="en-US" sz="3600" b="1" dirty="0">
-                <a:solidFill>
-                  <a:srgbClr val="B8B8B8"/>
-                </a:solidFill>
-                <a:latin typeface="Aptos" pitchFamily="34" charset="0"/>
-                <a:ea typeface="Aptos" pitchFamily="34" charset="-122"/>
-                <a:cs typeface="Aptos" pitchFamily="34" charset="-120"/>
-              </a:rPr>
-              <a:t>0</a:t>
-            </a:r>
-            <a:r>
-              <a:rPr lang="ru-RU" sz="3600" b="1" dirty="0">
-                <a:solidFill>
-                  <a:srgbClr val="B8B8B8"/>
-                </a:solidFill>
-                <a:latin typeface="Aptos" pitchFamily="34" charset="0"/>
-                <a:ea typeface="Aptos" pitchFamily="34" charset="-122"/>
-                <a:cs typeface="Aptos" pitchFamily="34" charset="-120"/>
-              </a:rPr>
-              <a:t>7</a:t>
-            </a:r>
-            <a:r>
-              <a:rPr lang="en-US" sz="3600" b="1" dirty="0">
-                <a:solidFill>
-                  <a:srgbClr val="B8B8B8"/>
-                </a:solidFill>
-                <a:latin typeface="Aptos" pitchFamily="34" charset="0"/>
-                <a:ea typeface="Aptos" pitchFamily="34" charset="-122"/>
-                <a:cs typeface="Aptos" pitchFamily="34" charset="-120"/>
-              </a:rPr>
-              <a:t>/09</a:t>
-            </a:r>
-            <a:endParaRPr lang="en-US" sz="3600" dirty="0"/>
-          </a:p>
-        </p:txBody>
-      </p:sp>
-      <p:sp>
-        <p:nvSpPr>
-          <p:cNvPr id="5" name="Shape 27">
-            <a:extLst>
-              <a:ext uri="{FF2B5EF4-FFF2-40B4-BE49-F238E27FC236}">
-                <a16:creationId xmlns:a16="http://schemas.microsoft.com/office/drawing/2014/main" id="{CD2C0E00-4A0E-4E35-E369-7D09F31C69A7}"/>
-              </a:ext>
-            </a:extLst>
-          </p:cNvPr>
-          <p:cNvSpPr/>
-          <p:nvPr/>
-        </p:nvSpPr>
-        <p:spPr>
-          <a:xfrm>
-            <a:off x="1350363" y="2383730"/>
-            <a:ext cx="2102096" cy="1177002"/>
-          </a:xfrm>
-          <a:prstGeom prst="roundRect">
-            <a:avLst>
-              <a:gd name="adj" fmla="val 4132"/>
-            </a:avLst>
-          </a:prstGeom>
-          <a:solidFill>
-            <a:schemeClr val="accent5">
-              <a:lumMod val="40000"/>
-              <a:lumOff val="60000"/>
-            </a:schemeClr>
-          </a:solidFill>
-          <a:ln w="12700">
-            <a:solidFill>
-              <a:schemeClr val="accent1"/>
-            </a:solidFill>
-            <a:prstDash val="solid"/>
-          </a:ln>
-        </p:spPr>
-        <p:txBody>
-          <a:bodyPr/>
-          <a:lstStyle/>
-          <a:p>
-            <a:pPr algn="ctr"/>
-            <a:r>
-              <a:rPr lang="ru-RU" sz="2400" dirty="0">
-                <a:latin typeface="Aptos Display" panose="020B0004020202020204" pitchFamily="34" charset="0"/>
-              </a:rPr>
-              <a:t>Клиент </a:t>
-            </a:r>
-          </a:p>
-          <a:p>
-            <a:pPr algn="ctr"/>
-            <a:r>
-              <a:rPr lang="ru-RU" sz="2400" dirty="0">
-                <a:latin typeface="Aptos Display" panose="020B0004020202020204" pitchFamily="34" charset="0"/>
-              </a:rPr>
-              <a:t>(веб-браузер)</a:t>
-            </a:r>
-          </a:p>
-        </p:txBody>
-      </p:sp>
-      <p:sp>
-        <p:nvSpPr>
-          <p:cNvPr id="6" name="Shape 27">
-            <a:extLst>
-              <a:ext uri="{FF2B5EF4-FFF2-40B4-BE49-F238E27FC236}">
-                <a16:creationId xmlns:a16="http://schemas.microsoft.com/office/drawing/2014/main" id="{6DAD1E28-80AF-2FF7-16C2-9DB047F237AA}"/>
-              </a:ext>
-            </a:extLst>
-          </p:cNvPr>
-          <p:cNvSpPr/>
-          <p:nvPr/>
-        </p:nvSpPr>
-        <p:spPr>
-          <a:xfrm>
-            <a:off x="7534175" y="2365250"/>
-            <a:ext cx="2194201" cy="1177002"/>
-          </a:xfrm>
-          <a:prstGeom prst="roundRect">
-            <a:avLst>
-              <a:gd name="adj" fmla="val 4132"/>
-            </a:avLst>
-          </a:prstGeom>
-          <a:solidFill>
-            <a:schemeClr val="accent5">
-              <a:lumMod val="40000"/>
-              <a:lumOff val="60000"/>
-            </a:schemeClr>
-          </a:solidFill>
-          <a:ln w="12700">
-            <a:solidFill>
-              <a:schemeClr val="accent1"/>
-            </a:solidFill>
-            <a:prstDash val="solid"/>
-          </a:ln>
-        </p:spPr>
-        <p:txBody>
-          <a:bodyPr/>
-          <a:lstStyle/>
-          <a:p>
-            <a:pPr algn="ctr"/>
-            <a:endParaRPr lang="en-US" sz="2400" dirty="0">
-              <a:latin typeface="Aptos Display" panose="020B0004020202020204" pitchFamily="34" charset="0"/>
-            </a:endParaRPr>
-          </a:p>
-        </p:txBody>
-      </p:sp>
-      <p:sp>
-        <p:nvSpPr>
-          <p:cNvPr id="7" name="Shape 27">
-            <a:extLst>
-              <a:ext uri="{FF2B5EF4-FFF2-40B4-BE49-F238E27FC236}">
-                <a16:creationId xmlns:a16="http://schemas.microsoft.com/office/drawing/2014/main" id="{9D16E606-51A4-0206-FCE2-A7F398CEA2D7}"/>
-              </a:ext>
-            </a:extLst>
-          </p:cNvPr>
-          <p:cNvSpPr/>
-          <p:nvPr/>
-        </p:nvSpPr>
-        <p:spPr>
-          <a:xfrm>
-            <a:off x="4632569" y="2383730"/>
-            <a:ext cx="2102096" cy="1177002"/>
-          </a:xfrm>
-          <a:prstGeom prst="roundRect">
-            <a:avLst>
-              <a:gd name="adj" fmla="val 4132"/>
-            </a:avLst>
-          </a:prstGeom>
-          <a:solidFill>
-            <a:schemeClr val="accent5">
-              <a:lumMod val="40000"/>
-              <a:lumOff val="60000"/>
-            </a:schemeClr>
-          </a:solidFill>
-          <a:ln w="12700">
-            <a:solidFill>
-              <a:schemeClr val="accent1"/>
-            </a:solidFill>
-            <a:prstDash val="solid"/>
-          </a:ln>
-        </p:spPr>
-        <p:txBody>
-          <a:bodyPr/>
-          <a:lstStyle/>
-          <a:p>
-            <a:pPr algn="ctr"/>
-            <a:endParaRPr lang="en-US" sz="2400" dirty="0">
-              <a:latin typeface="Aptos Display" panose="020B0004020202020204" pitchFamily="34" charset="0"/>
-            </a:endParaRPr>
-          </a:p>
-        </p:txBody>
-      </p:sp>
-      <p:sp>
-        <p:nvSpPr>
-          <p:cNvPr id="8" name="Shape 27">
-            <a:extLst>
-              <a:ext uri="{FF2B5EF4-FFF2-40B4-BE49-F238E27FC236}">
-                <a16:creationId xmlns:a16="http://schemas.microsoft.com/office/drawing/2014/main" id="{CEDE5C8A-4095-9B8D-4BE0-512B554AA625}"/>
-              </a:ext>
-            </a:extLst>
-          </p:cNvPr>
-          <p:cNvSpPr/>
-          <p:nvPr/>
-        </p:nvSpPr>
-        <p:spPr>
-          <a:xfrm>
-            <a:off x="7534175" y="4137221"/>
-            <a:ext cx="2194201" cy="1228573"/>
-          </a:xfrm>
-          <a:prstGeom prst="roundRect">
-            <a:avLst>
-              <a:gd name="adj" fmla="val 4132"/>
-            </a:avLst>
-          </a:prstGeom>
-          <a:solidFill>
-            <a:schemeClr val="accent5">
-              <a:lumMod val="40000"/>
-              <a:lumOff val="60000"/>
-            </a:schemeClr>
-          </a:solidFill>
-          <a:ln w="12700">
-            <a:solidFill>
-              <a:schemeClr val="accent1"/>
-            </a:solidFill>
-            <a:prstDash val="solid"/>
-          </a:ln>
-        </p:spPr>
-        <p:txBody>
-          <a:bodyPr/>
-          <a:lstStyle/>
-          <a:p>
-            <a:pPr algn="ctr"/>
-            <a:endParaRPr lang="en-US" sz="2400" dirty="0">
-              <a:latin typeface="Aptos Display" panose="020B0004020202020204" pitchFamily="34" charset="0"/>
-            </a:endParaRPr>
-          </a:p>
-          <a:p>
-            <a:pPr algn="ctr"/>
-            <a:r>
-              <a:rPr lang="en-US" sz="2400" dirty="0">
-                <a:latin typeface="Aptos Display" panose="020B0004020202020204" pitchFamily="34" charset="0"/>
-              </a:rPr>
-              <a:t>MySQL</a:t>
-            </a:r>
-          </a:p>
-        </p:txBody>
-      </p:sp>
-      <p:sp>
-        <p:nvSpPr>
-          <p:cNvPr id="9" name="Прямоугольник 8">
-            <a:extLst>
-              <a:ext uri="{FF2B5EF4-FFF2-40B4-BE49-F238E27FC236}">
-                <a16:creationId xmlns:a16="http://schemas.microsoft.com/office/drawing/2014/main" id="{EBEFCFE0-9D36-699F-4CA1-5D263E2BC54E}"/>
-              </a:ext>
-            </a:extLst>
-          </p:cNvPr>
-          <p:cNvSpPr/>
-          <p:nvPr/>
-        </p:nvSpPr>
-        <p:spPr>
-          <a:xfrm>
-            <a:off x="4398490" y="1753507"/>
-            <a:ext cx="5619750" cy="3905250"/>
-          </a:xfrm>
-          <a:prstGeom prst="rect">
-            <a:avLst/>
-          </a:prstGeom>
-          <a:noFill/>
-          <a:ln>
-            <a:solidFill>
-              <a:schemeClr val="accent1"/>
-            </a:solidFill>
-          </a:ln>
-        </p:spPr>
-        <p:style>
-          <a:lnRef idx="2">
-            <a:schemeClr val="accent1">
-              <a:shade val="15000"/>
-            </a:schemeClr>
-          </a:lnRef>
-          <a:fillRef idx="1">
-            <a:schemeClr val="accent1"/>
-          </a:fillRef>
-          <a:effectRef idx="0">
-            <a:schemeClr val="accent1"/>
-          </a:effectRef>
-          <a:fontRef idx="minor">
-            <a:schemeClr val="lt1"/>
-          </a:fontRef>
-        </p:style>
-        <p:txBody>
-          <a:bodyPr rtlCol="0" anchor="ctr"/>
-          <a:lstStyle/>
-          <a:p>
-            <a:pPr algn="ctr"/>
-            <a:endParaRPr lang="ru-RU"/>
-          </a:p>
-        </p:txBody>
-      </p:sp>
-      <p:cxnSp>
-        <p:nvCxnSpPr>
-          <p:cNvPr id="11" name="Прямая со стрелкой 10">
-            <a:extLst>
-              <a:ext uri="{FF2B5EF4-FFF2-40B4-BE49-F238E27FC236}">
-                <a16:creationId xmlns:a16="http://schemas.microsoft.com/office/drawing/2014/main" id="{B36836A2-2241-D1FB-96D2-5224337542FC}"/>
-              </a:ext>
-            </a:extLst>
-          </p:cNvPr>
-          <p:cNvCxnSpPr/>
-          <p:nvPr/>
-        </p:nvCxnSpPr>
-        <p:spPr>
-          <a:xfrm>
-            <a:off x="6975872" y="2988390"/>
-            <a:ext cx="400050" cy="0"/>
-          </a:xfrm>
-          <a:prstGeom prst="straightConnector1">
-            <a:avLst/>
-          </a:prstGeom>
-          <a:ln>
-            <a:tailEnd type="triangle"/>
-          </a:ln>
-        </p:spPr>
-        <p:style>
-          <a:lnRef idx="1">
-            <a:schemeClr val="accent1"/>
-          </a:lnRef>
-          <a:fillRef idx="0">
-            <a:schemeClr val="accent1"/>
-          </a:fillRef>
-          <a:effectRef idx="0">
-            <a:schemeClr val="accent1"/>
-          </a:effectRef>
-          <a:fontRef idx="minor">
-            <a:schemeClr val="tx1"/>
-          </a:fontRef>
-        </p:style>
-      </p:cxnSp>
-      <p:cxnSp>
-        <p:nvCxnSpPr>
-          <p:cNvPr id="13" name="Прямая со стрелкой 12">
-            <a:extLst>
-              <a:ext uri="{FF2B5EF4-FFF2-40B4-BE49-F238E27FC236}">
-                <a16:creationId xmlns:a16="http://schemas.microsoft.com/office/drawing/2014/main" id="{03288707-E560-C678-58ED-A2059A4D495F}"/>
-              </a:ext>
-            </a:extLst>
-          </p:cNvPr>
-          <p:cNvCxnSpPr/>
-          <p:nvPr/>
-        </p:nvCxnSpPr>
-        <p:spPr>
-          <a:xfrm>
-            <a:off x="8631275" y="3652454"/>
-            <a:ext cx="0" cy="413005"/>
-          </a:xfrm>
-          <a:prstGeom prst="straightConnector1">
-            <a:avLst/>
-          </a:prstGeom>
-          <a:ln>
-            <a:tailEnd type="triangle"/>
-          </a:ln>
-        </p:spPr>
-        <p:style>
-          <a:lnRef idx="1">
-            <a:schemeClr val="accent1"/>
-          </a:lnRef>
-          <a:fillRef idx="0">
-            <a:schemeClr val="accent1"/>
-          </a:fillRef>
-          <a:effectRef idx="0">
-            <a:schemeClr val="accent1"/>
-          </a:effectRef>
-          <a:fontRef idx="minor">
-            <a:schemeClr val="tx1"/>
-          </a:fontRef>
-        </p:style>
-      </p:cxnSp>
-      <p:cxnSp>
-        <p:nvCxnSpPr>
-          <p:cNvPr id="14" name="Прямая со стрелкой 13">
-            <a:extLst>
-              <a:ext uri="{FF2B5EF4-FFF2-40B4-BE49-F238E27FC236}">
-                <a16:creationId xmlns:a16="http://schemas.microsoft.com/office/drawing/2014/main" id="{1D16F90B-6CCC-2C40-DFA6-AA7BB8734892}"/>
-              </a:ext>
-            </a:extLst>
-          </p:cNvPr>
-          <p:cNvCxnSpPr/>
-          <p:nvPr/>
-        </p:nvCxnSpPr>
-        <p:spPr>
-          <a:xfrm>
-            <a:off x="3794121" y="2801083"/>
-            <a:ext cx="400050" cy="0"/>
-          </a:xfrm>
-          <a:prstGeom prst="straightConnector1">
-            <a:avLst/>
-          </a:prstGeom>
-          <a:ln>
-            <a:tailEnd type="triangle"/>
-          </a:ln>
-        </p:spPr>
-        <p:style>
-          <a:lnRef idx="1">
-            <a:schemeClr val="accent1"/>
-          </a:lnRef>
-          <a:fillRef idx="0">
-            <a:schemeClr val="accent1"/>
-          </a:fillRef>
-          <a:effectRef idx="0">
-            <a:schemeClr val="accent1"/>
-          </a:effectRef>
-          <a:fontRef idx="minor">
-            <a:schemeClr val="tx1"/>
-          </a:fontRef>
-        </p:style>
-      </p:cxnSp>
-      <p:sp>
-        <p:nvSpPr>
-          <p:cNvPr id="15" name="TextBox 14">
-            <a:extLst>
-              <a:ext uri="{FF2B5EF4-FFF2-40B4-BE49-F238E27FC236}">
-                <a16:creationId xmlns:a16="http://schemas.microsoft.com/office/drawing/2014/main" id="{B2548A71-F416-8D0B-02A2-5779C410461A}"/>
-              </a:ext>
-            </a:extLst>
-          </p:cNvPr>
-          <p:cNvSpPr txBox="1"/>
-          <p:nvPr/>
-        </p:nvSpPr>
-        <p:spPr>
-          <a:xfrm>
-            <a:off x="3576032" y="2365250"/>
-            <a:ext cx="964555" cy="369332"/>
-          </a:xfrm>
-          <a:prstGeom prst="rect">
-            <a:avLst/>
-          </a:prstGeom>
-          <a:noFill/>
-        </p:spPr>
-        <p:txBody>
-          <a:bodyPr wrap="square" rtlCol="0">
-            <a:spAutoFit/>
-          </a:bodyPr>
-          <a:lstStyle/>
-          <a:p>
-            <a:r>
-              <a:rPr lang="en-US" dirty="0"/>
-              <a:t>HTTPS</a:t>
-            </a:r>
-            <a:endParaRPr lang="ru-RU" dirty="0"/>
-          </a:p>
-        </p:txBody>
-      </p:sp>
-      <p:sp>
-        <p:nvSpPr>
-          <p:cNvPr id="16" name="TextBox 15">
-            <a:extLst>
-              <a:ext uri="{FF2B5EF4-FFF2-40B4-BE49-F238E27FC236}">
-                <a16:creationId xmlns:a16="http://schemas.microsoft.com/office/drawing/2014/main" id="{7B624335-476D-862F-EECE-690FA53143E9}"/>
-              </a:ext>
-            </a:extLst>
-          </p:cNvPr>
-          <p:cNvSpPr txBox="1"/>
-          <p:nvPr/>
-        </p:nvSpPr>
-        <p:spPr>
-          <a:xfrm>
-            <a:off x="4632569" y="1806430"/>
-            <a:ext cx="2668649" cy="369332"/>
-          </a:xfrm>
-          <a:prstGeom prst="rect">
-            <a:avLst/>
-          </a:prstGeom>
-          <a:noFill/>
-        </p:spPr>
-        <p:txBody>
-          <a:bodyPr wrap="square" rtlCol="0">
-            <a:spAutoFit/>
-          </a:bodyPr>
-          <a:lstStyle/>
-          <a:p>
-            <a:r>
-              <a:rPr lang="en-US" dirty="0"/>
-              <a:t>Docker</a:t>
-            </a:r>
-            <a:r>
-              <a:rPr lang="ru-RU" dirty="0"/>
-              <a:t> </a:t>
-            </a:r>
-            <a:r>
-              <a:rPr lang="en-US" dirty="0"/>
-              <a:t>server</a:t>
-            </a:r>
-            <a:endParaRPr lang="ru-RU" dirty="0"/>
-          </a:p>
-        </p:txBody>
-      </p:sp>
-      <p:sp>
-        <p:nvSpPr>
-          <p:cNvPr id="17" name="Овал 16">
-            <a:extLst>
-              <a:ext uri="{FF2B5EF4-FFF2-40B4-BE49-F238E27FC236}">
-                <a16:creationId xmlns:a16="http://schemas.microsoft.com/office/drawing/2014/main" id="{1C1B41C7-45A7-ECC4-7162-7ECCE0117463}"/>
-              </a:ext>
-            </a:extLst>
-          </p:cNvPr>
-          <p:cNvSpPr/>
-          <p:nvPr/>
-        </p:nvSpPr>
-        <p:spPr>
-          <a:xfrm>
-            <a:off x="-1479899" y="3373425"/>
-            <a:ext cx="2457450" cy="2457450"/>
-          </a:xfrm>
-          <a:prstGeom prst="ellipse">
-            <a:avLst/>
-          </a:prstGeom>
-          <a:solidFill>
-            <a:srgbClr val="FFC4A3"/>
-          </a:solidFill>
-          <a:ln>
-            <a:solidFill>
-              <a:schemeClr val="accent2">
-                <a:lumMod val="75000"/>
-              </a:schemeClr>
-            </a:solidFill>
-          </a:ln>
-        </p:spPr>
-        <p:style>
-          <a:lnRef idx="2">
-            <a:schemeClr val="dk1"/>
-          </a:lnRef>
-          <a:fillRef idx="1">
-            <a:schemeClr val="lt1"/>
-          </a:fillRef>
-          <a:effectRef idx="0">
-            <a:schemeClr val="dk1"/>
-          </a:effectRef>
-          <a:fontRef idx="minor">
-            <a:schemeClr val="dk1"/>
-          </a:fontRef>
-        </p:style>
-        <p:txBody>
-          <a:bodyPr rtlCol="0" anchor="ctr"/>
-          <a:lstStyle/>
-          <a:p>
-            <a:pPr algn="ctr"/>
-            <a:endParaRPr lang="ru-RU"/>
-          </a:p>
-        </p:txBody>
-      </p:sp>
-      <p:sp>
-        <p:nvSpPr>
-          <p:cNvPr id="18" name="Овал 17">
-            <a:extLst>
-              <a:ext uri="{FF2B5EF4-FFF2-40B4-BE49-F238E27FC236}">
-                <a16:creationId xmlns:a16="http://schemas.microsoft.com/office/drawing/2014/main" id="{75F72057-41E8-0206-417B-6A1F7394865F}"/>
-              </a:ext>
-            </a:extLst>
-          </p:cNvPr>
-          <p:cNvSpPr/>
-          <p:nvPr/>
-        </p:nvSpPr>
-        <p:spPr>
-          <a:xfrm>
-            <a:off x="3794121" y="6270500"/>
-            <a:ext cx="2457450" cy="2457450"/>
-          </a:xfrm>
-          <a:prstGeom prst="ellipse">
-            <a:avLst/>
-          </a:prstGeom>
-          <a:solidFill>
-            <a:srgbClr val="FFC4A3"/>
-          </a:solidFill>
-          <a:ln>
-            <a:solidFill>
-              <a:schemeClr val="accent2">
-                <a:lumMod val="75000"/>
-              </a:schemeClr>
-            </a:solidFill>
-          </a:ln>
-        </p:spPr>
-        <p:style>
-          <a:lnRef idx="2">
-            <a:schemeClr val="dk1"/>
-          </a:lnRef>
-          <a:fillRef idx="1">
-            <a:schemeClr val="lt1"/>
-          </a:fillRef>
-          <a:effectRef idx="0">
-            <a:schemeClr val="dk1"/>
-          </a:effectRef>
-          <a:fontRef idx="minor">
-            <a:schemeClr val="dk1"/>
-          </a:fontRef>
-        </p:style>
-        <p:txBody>
-          <a:bodyPr rtlCol="0" anchor="ctr"/>
-          <a:lstStyle/>
-          <a:p>
-            <a:pPr algn="ctr"/>
-            <a:endParaRPr lang="ru-RU"/>
-          </a:p>
-        </p:txBody>
-      </p:sp>
-      <p:sp>
-        <p:nvSpPr>
-          <p:cNvPr id="19" name="Овал 18">
-            <a:extLst>
-              <a:ext uri="{FF2B5EF4-FFF2-40B4-BE49-F238E27FC236}">
-                <a16:creationId xmlns:a16="http://schemas.microsoft.com/office/drawing/2014/main" id="{7749FB07-B97E-20D3-8261-B8EAC488E09A}"/>
-              </a:ext>
-            </a:extLst>
-          </p:cNvPr>
-          <p:cNvSpPr/>
-          <p:nvPr/>
-        </p:nvSpPr>
-        <p:spPr>
-          <a:xfrm>
-            <a:off x="11410950" y="976316"/>
-            <a:ext cx="2457450" cy="2457450"/>
-          </a:xfrm>
-          <a:prstGeom prst="ellipse">
-            <a:avLst/>
-          </a:prstGeom>
-          <a:solidFill>
-            <a:srgbClr val="FFC4A3"/>
-          </a:solidFill>
-          <a:ln>
-            <a:solidFill>
-              <a:schemeClr val="accent2">
-                <a:lumMod val="75000"/>
-              </a:schemeClr>
-            </a:solidFill>
-          </a:ln>
-        </p:spPr>
-        <p:style>
-          <a:lnRef idx="2">
-            <a:schemeClr val="dk1"/>
-          </a:lnRef>
-          <a:fillRef idx="1">
-            <a:schemeClr val="lt1"/>
-          </a:fillRef>
-          <a:effectRef idx="0">
-            <a:schemeClr val="dk1"/>
-          </a:effectRef>
-          <a:fontRef idx="minor">
-            <a:schemeClr val="dk1"/>
-          </a:fontRef>
-        </p:style>
-        <p:txBody>
-          <a:bodyPr rtlCol="0" anchor="ctr"/>
-          <a:lstStyle/>
-          <a:p>
-            <a:pPr algn="ctr"/>
-            <a:endParaRPr lang="ru-RU"/>
-          </a:p>
-        </p:txBody>
-      </p:sp>
-      <p:sp>
-        <p:nvSpPr>
-          <p:cNvPr id="20" name="TextBox 19">
-            <a:extLst>
-              <a:ext uri="{FF2B5EF4-FFF2-40B4-BE49-F238E27FC236}">
-                <a16:creationId xmlns:a16="http://schemas.microsoft.com/office/drawing/2014/main" id="{F477012E-DF76-EBEA-CD2C-383E2CC03097}"/>
-              </a:ext>
-            </a:extLst>
-          </p:cNvPr>
-          <p:cNvSpPr txBox="1"/>
-          <p:nvPr/>
-        </p:nvSpPr>
-        <p:spPr>
-          <a:xfrm>
-            <a:off x="4676301" y="2595862"/>
-            <a:ext cx="2002415" cy="830997"/>
-          </a:xfrm>
-          <a:prstGeom prst="rect">
-            <a:avLst/>
-          </a:prstGeom>
-          <a:noFill/>
-        </p:spPr>
-        <p:txBody>
-          <a:bodyPr wrap="square" rtlCol="0">
-            <a:spAutoFit/>
-          </a:bodyPr>
-          <a:lstStyle/>
-          <a:p>
-            <a:pPr algn="ctr"/>
-            <a:r>
-              <a:rPr lang="en-US" sz="2400" dirty="0">
-                <a:latin typeface="Aptos Display" panose="020B0004020202020204" pitchFamily="34" charset="0"/>
-              </a:rPr>
-              <a:t>Nginx reverse proxy</a:t>
-            </a:r>
-          </a:p>
-        </p:txBody>
-      </p:sp>
-      <p:sp>
-        <p:nvSpPr>
-          <p:cNvPr id="21" name="TextBox 20">
-            <a:extLst>
-              <a:ext uri="{FF2B5EF4-FFF2-40B4-BE49-F238E27FC236}">
-                <a16:creationId xmlns:a16="http://schemas.microsoft.com/office/drawing/2014/main" id="{83933FB6-9743-CFA5-3A35-953EAF8B2E0D}"/>
-              </a:ext>
-            </a:extLst>
-          </p:cNvPr>
-          <p:cNvSpPr txBox="1"/>
-          <p:nvPr/>
-        </p:nvSpPr>
-        <p:spPr>
-          <a:xfrm>
-            <a:off x="7617023" y="2502369"/>
-            <a:ext cx="2028503" cy="830997"/>
-          </a:xfrm>
-          <a:prstGeom prst="rect">
-            <a:avLst/>
-          </a:prstGeom>
-          <a:noFill/>
-        </p:spPr>
-        <p:txBody>
-          <a:bodyPr wrap="square" rtlCol="0">
-            <a:spAutoFit/>
-          </a:bodyPr>
-          <a:lstStyle/>
-          <a:p>
-            <a:pPr algn="ctr"/>
-            <a:r>
-              <a:rPr lang="en-US" sz="2400" dirty="0">
-                <a:latin typeface="Aptos Display" panose="020B0004020202020204" pitchFamily="34" charset="0"/>
-              </a:rPr>
-              <a:t>Flask-</a:t>
-            </a:r>
-            <a:r>
-              <a:rPr lang="ru-RU" sz="2400" dirty="0">
-                <a:latin typeface="Aptos Display" panose="020B0004020202020204" pitchFamily="34" charset="0"/>
-              </a:rPr>
-              <a:t>приложение</a:t>
-            </a:r>
-            <a:endParaRPr lang="en-US" sz="2400" dirty="0">
-              <a:latin typeface="Aptos Display" panose="020B0004020202020204" pitchFamily="34" charset="0"/>
-            </a:endParaRPr>
-          </a:p>
-        </p:txBody>
-      </p:sp>
-    </p:spTree>
-    <p:extLst>
-      <p:ext uri="{BB962C8B-B14F-4D97-AF65-F5344CB8AC3E}">
-        <p14:creationId xmlns:p14="http://schemas.microsoft.com/office/powerpoint/2010/main" val="2191049637"/>
-      </p:ext>
-    </p:extLst>
-  </p:cSld>
-  <p:clrMapOvr>
-    <a:masterClrMapping/>
-  </p:clrMapOvr>
-</p:sld>
-</file>
-
-<file path=ppt/slides/slide8.xml><?xml version="1.0" encoding="utf-8"?>
-<p:sld xmlns:a="http://schemas.openxmlformats.org/drawingml/2006/main" xmlns:r="http://schemas.openxmlformats.org/officeDocument/2006/relationships" xmlns:p="http://schemas.openxmlformats.org/presentationml/2006/main">
-  <p:cSld>
-    <p:spTree>
-      <p:nvGrpSpPr>
-        <p:cNvPr id="1" name=""/>
-        <p:cNvGrpSpPr/>
-        <p:nvPr/>
-      </p:nvGrpSpPr>
-      <p:grpSpPr>
-        <a:xfrm>
-          <a:off x="0" y="0"/>
-          <a:ext cx="0" cy="0"/>
-          <a:chOff x="0" y="0"/>
-          <a:chExt cx="0" cy="0"/>
-        </a:xfrm>
-      </p:grpSpPr>
-      <p:sp>
-        <p:nvSpPr>
-          <p:cNvPr id="2" name="Shape 0"/>
-          <p:cNvSpPr/>
-          <p:nvPr/>
-        </p:nvSpPr>
-        <p:spPr>
-          <a:xfrm>
-            <a:off x="0" y="0"/>
-            <a:ext cx="12191695" cy="749808"/>
-          </a:xfrm>
-          <a:prstGeom prst="rect">
-            <a:avLst/>
-          </a:prstGeom>
-          <a:solidFill>
-            <a:srgbClr val="FFC4A3"/>
-          </a:solidFill>
-          <a:ln w="12700">
-            <a:solidFill>
-              <a:srgbClr val="FFC4A3"/>
-            </a:solidFill>
-            <a:prstDash val="solid"/>
-          </a:ln>
-        </p:spPr>
-      </p:sp>
-      <p:sp>
-        <p:nvSpPr>
-          <p:cNvPr id="3" name="Text 1"/>
-          <p:cNvSpPr/>
-          <p:nvPr/>
-        </p:nvSpPr>
-        <p:spPr>
-          <a:xfrm>
             <a:off x="507605" y="291072"/>
             <a:ext cx="5029200" cy="219456"/>
           </a:xfrm>
@@ -6237,6 +4802,17 @@
               <a:buNone/>
             </a:pPr>
             <a:r>
+              <a:rPr lang="ru-RU" sz="3600" b="1" dirty="0">
+                <a:solidFill>
+                  <a:srgbClr val="B8B8B8"/>
+                </a:solidFill>
+                <a:latin typeface="Bahnschrift Light" panose="020B0502040204020203" pitchFamily="34" charset="0"/>
+                <a:ea typeface="Aptos" pitchFamily="34" charset="-122"/>
+                <a:cs typeface="Aptos" pitchFamily="34" charset="-120"/>
+              </a:rPr>
+              <a:t>07</a:t>
+            </a:r>
+            <a:r>
               <a:rPr lang="en-US" sz="3600" b="1" dirty="0">
                 <a:solidFill>
                   <a:srgbClr val="B8B8B8"/>
@@ -6245,7 +4821,7 @@
                 <a:ea typeface="Aptos" pitchFamily="34" charset="-122"/>
                 <a:cs typeface="Aptos" pitchFamily="34" charset="-120"/>
               </a:rPr>
-              <a:t>0</a:t>
+              <a:t>/0</a:t>
             </a:r>
             <a:r>
               <a:rPr lang="ru-RU" sz="3600" b="1" dirty="0">
@@ -6257,17 +4833,6 @@
                 <a:cs typeface="Aptos" pitchFamily="34" charset="-120"/>
               </a:rPr>
               <a:t>8</a:t>
-            </a:r>
-            <a:r>
-              <a:rPr lang="en-US" sz="3600" b="1" dirty="0">
-                <a:solidFill>
-                  <a:srgbClr val="B8B8B8"/>
-                </a:solidFill>
-                <a:latin typeface="Bahnschrift Light" panose="020B0502040204020203" pitchFamily="34" charset="0"/>
-                <a:ea typeface="Aptos" pitchFamily="34" charset="-122"/>
-                <a:cs typeface="Aptos" pitchFamily="34" charset="-120"/>
-              </a:rPr>
-              <a:t>/09</a:t>
             </a:r>
             <a:endParaRPr lang="en-US" sz="3600" dirty="0">
               <a:latin typeface="Bahnschrift Light" panose="020B0502040204020203" pitchFamily="34" charset="0"/>
@@ -6775,7 +5340,7 @@
 </p:sld>
 </file>
 
-<file path=ppt/slides/slide9.xml><?xml version="1.0" encoding="utf-8"?>
+<file path=ppt/slides/slide8.xml><?xml version="1.0" encoding="utf-8"?>
 <p:sld xmlns:a="http://schemas.openxmlformats.org/drawingml/2006/main" xmlns:r="http://schemas.openxmlformats.org/officeDocument/2006/relationships" xmlns:p="http://schemas.openxmlformats.org/presentationml/2006/main">
   <p:cSld>
     <p:spTree>
@@ -6872,7 +5437,7 @@
         </p:nvSpPr>
         <p:spPr>
           <a:xfrm>
-            <a:off x="2412753" y="2109123"/>
+            <a:off x="2412751" y="2109123"/>
             <a:ext cx="8132621" cy="2766244"/>
           </a:xfrm>
           <a:prstGeom prst="roundRect">
@@ -6993,7 +5558,7 @@
                 <a:ea typeface="Aptos" pitchFamily="34" charset="-122"/>
                 <a:cs typeface="Aptos" pitchFamily="34" charset="-120"/>
               </a:rPr>
-              <a:t>9</a:t>
+              <a:t>8</a:t>
             </a:r>
             <a:r>
               <a:rPr lang="en-US" sz="3600" b="1" dirty="0">
@@ -7004,7 +5569,18 @@
                 <a:ea typeface="Aptos" pitchFamily="34" charset="-122"/>
                 <a:cs typeface="Aptos" pitchFamily="34" charset="-120"/>
               </a:rPr>
-              <a:t>/09</a:t>
+              <a:t>/0</a:t>
+            </a:r>
+            <a:r>
+              <a:rPr lang="ru-RU" sz="3600" b="1" dirty="0">
+                <a:solidFill>
+                  <a:srgbClr val="B8B8B8"/>
+                </a:solidFill>
+                <a:latin typeface="Aptos" pitchFamily="34" charset="0"/>
+                <a:ea typeface="Aptos" pitchFamily="34" charset="-122"/>
+                <a:cs typeface="Aptos" pitchFamily="34" charset="-120"/>
+              </a:rPr>
+              <a:t>8</a:t>
             </a:r>
             <a:endParaRPr lang="en-US" sz="3600" dirty="0"/>
           </a:p>
@@ -7176,6 +5752,503 @@
     <p:extLst>
       <p:ext uri="{BB962C8B-B14F-4D97-AF65-F5344CB8AC3E}">
         <p14:creationId xmlns:p14="http://schemas.microsoft.com/office/powerpoint/2010/main" val="1664339838"/>
+      </p:ext>
+    </p:extLst>
+  </p:cSld>
+  <p:clrMapOvr>
+    <a:masterClrMapping/>
+  </p:clrMapOvr>
+</p:sld>
+</file>
+
+<file path=ppt/slides/slide9.xml><?xml version="1.0" encoding="utf-8"?>
+<p:sld xmlns:a="http://schemas.openxmlformats.org/drawingml/2006/main" xmlns:r="http://schemas.openxmlformats.org/officeDocument/2006/relationships" xmlns:p="http://schemas.openxmlformats.org/presentationml/2006/main">
+  <p:cSld>
+    <p:bg>
+      <p:bgPr>
+        <a:solidFill>
+          <a:srgbClr val="FFC4A3"/>
+        </a:solidFill>
+        <a:effectLst/>
+      </p:bgPr>
+    </p:bg>
+    <p:spTree>
+      <p:nvGrpSpPr>
+        <p:cNvPr id="1" name=""/>
+        <p:cNvGrpSpPr/>
+        <p:nvPr/>
+      </p:nvGrpSpPr>
+      <p:grpSpPr>
+        <a:xfrm>
+          <a:off x="0" y="0"/>
+          <a:ext cx="0" cy="0"/>
+          <a:chOff x="0" y="0"/>
+          <a:chExt cx="0" cy="0"/>
+        </a:xfrm>
+      </p:grpSpPr>
+      <p:sp>
+        <p:nvSpPr>
+          <p:cNvPr id="32" name="Овал 31">
+            <a:extLst>
+              <a:ext uri="{FF2B5EF4-FFF2-40B4-BE49-F238E27FC236}">
+                <a16:creationId xmlns:a16="http://schemas.microsoft.com/office/drawing/2014/main" id="{C3CD927C-0D78-6C61-3DA1-D0128CF97D03}"/>
+              </a:ext>
+            </a:extLst>
+          </p:cNvPr>
+          <p:cNvSpPr/>
+          <p:nvPr/>
+        </p:nvSpPr>
+        <p:spPr>
+          <a:xfrm>
+            <a:off x="1028700" y="5937691"/>
+            <a:ext cx="2457450" cy="2457450"/>
+          </a:xfrm>
+          <a:prstGeom prst="ellipse">
+            <a:avLst/>
+          </a:prstGeom>
+          <a:solidFill>
+            <a:schemeClr val="accent1">
+              <a:lumMod val="60000"/>
+              <a:lumOff val="40000"/>
+            </a:schemeClr>
+          </a:solidFill>
+          <a:ln>
+            <a:solidFill>
+              <a:schemeClr val="accent1"/>
+            </a:solidFill>
+          </a:ln>
+        </p:spPr>
+        <p:style>
+          <a:lnRef idx="2">
+            <a:schemeClr val="dk1"/>
+          </a:lnRef>
+          <a:fillRef idx="1">
+            <a:schemeClr val="lt1"/>
+          </a:fillRef>
+          <a:effectRef idx="0">
+            <a:schemeClr val="dk1"/>
+          </a:effectRef>
+          <a:fontRef idx="minor">
+            <a:schemeClr val="dk1"/>
+          </a:fontRef>
+        </p:style>
+        <p:txBody>
+          <a:bodyPr rtlCol="0" anchor="ctr"/>
+          <a:lstStyle/>
+          <a:p>
+            <a:pPr algn="ctr"/>
+            <a:endParaRPr lang="ru-RU"/>
+          </a:p>
+        </p:txBody>
+      </p:sp>
+      <p:sp>
+        <p:nvSpPr>
+          <p:cNvPr id="30" name="Овал 29">
+            <a:extLst>
+              <a:ext uri="{FF2B5EF4-FFF2-40B4-BE49-F238E27FC236}">
+                <a16:creationId xmlns:a16="http://schemas.microsoft.com/office/drawing/2014/main" id="{56005B72-5DFD-0EEB-EC2C-30587A94F227}"/>
+              </a:ext>
+            </a:extLst>
+          </p:cNvPr>
+          <p:cNvSpPr/>
+          <p:nvPr/>
+        </p:nvSpPr>
+        <p:spPr>
+          <a:xfrm>
+            <a:off x="-828675" y="-611558"/>
+            <a:ext cx="2457450" cy="2457450"/>
+          </a:xfrm>
+          <a:prstGeom prst="ellipse">
+            <a:avLst/>
+          </a:prstGeom>
+          <a:solidFill>
+            <a:schemeClr val="accent1">
+              <a:lumMod val="60000"/>
+              <a:lumOff val="40000"/>
+            </a:schemeClr>
+          </a:solidFill>
+          <a:ln>
+            <a:solidFill>
+              <a:schemeClr val="accent1"/>
+            </a:solidFill>
+          </a:ln>
+        </p:spPr>
+        <p:style>
+          <a:lnRef idx="2">
+            <a:schemeClr val="dk1"/>
+          </a:lnRef>
+          <a:fillRef idx="1">
+            <a:schemeClr val="lt1"/>
+          </a:fillRef>
+          <a:effectRef idx="0">
+            <a:schemeClr val="dk1"/>
+          </a:effectRef>
+          <a:fontRef idx="minor">
+            <a:schemeClr val="dk1"/>
+          </a:fontRef>
+        </p:style>
+        <p:txBody>
+          <a:bodyPr rtlCol="0" anchor="ctr"/>
+          <a:lstStyle/>
+          <a:p>
+            <a:pPr algn="ctr"/>
+            <a:endParaRPr lang="ru-RU"/>
+          </a:p>
+        </p:txBody>
+      </p:sp>
+      <p:sp>
+        <p:nvSpPr>
+          <p:cNvPr id="3" name="Text 1"/>
+          <p:cNvSpPr/>
+          <p:nvPr/>
+        </p:nvSpPr>
+        <p:spPr>
+          <a:xfrm>
+            <a:off x="2053689" y="468534"/>
+            <a:ext cx="8084620" cy="1401510"/>
+          </a:xfrm>
+          <a:prstGeom prst="rect">
+            <a:avLst/>
+          </a:prstGeom>
+          <a:noFill/>
+          <a:ln/>
+        </p:spPr>
+        <p:txBody>
+          <a:bodyPr wrap="square" lIns="0" tIns="0" rIns="0" bIns="0" rtlCol="0" anchor="ctr"/>
+          <a:lstStyle/>
+          <a:p>
+            <a:pPr marL="0" indent="0" algn="ctr">
+              <a:buNone/>
+            </a:pPr>
+            <a:r>
+              <a:rPr lang="ru-RU" sz="1600" b="1" dirty="0"/>
+              <a:t>ФЕДЕРАЛЬНОЕ ГОСУДАРСТВЕННОЕ БЮДЖЕТНОЕ ОБРАЗОВАТЕЛЬНОЕ УЧРЕЖДЕНИЕ ВЫСШЕГО ОБРАЗОВАНИЯ </a:t>
+            </a:r>
+            <a:br>
+              <a:rPr lang="ru-RU" sz="1600" b="1" dirty="0"/>
+            </a:br>
+            <a:r>
+              <a:rPr lang="ru-RU" sz="1600" b="1" dirty="0"/>
+              <a:t>«САНКТ-ПЕТЕРБУРГСКИЙ ГОСУДАРСТВЕННЫЙ УНИВЕРСИТЕТ ТЕЛЕКОММУНИКАЦИЙ ИМ. ПРОФ. М.А. БОНЧ-БРУЕВИЧА» </a:t>
+            </a:r>
+            <a:br>
+              <a:rPr lang="ru-RU" sz="1600" b="1" dirty="0"/>
+            </a:br>
+            <a:r>
+              <a:rPr lang="ru-RU" sz="1600" b="1" dirty="0"/>
+              <a:t>(СПбГУТ) </a:t>
+            </a:r>
+            <a:br>
+              <a:rPr lang="ru-RU" sz="1600" b="1" dirty="0"/>
+            </a:br>
+            <a:br>
+              <a:rPr lang="ru-RU" sz="1600" b="1" dirty="0"/>
+            </a:br>
+            <a:r>
+              <a:rPr lang="ru-RU" sz="1600" b="1" dirty="0"/>
+              <a:t>АРХАНГЕЛЬСКИЙ КОЛЛЕДЖ ТЕЛЕКОММУНИКАЦИЙ </a:t>
+            </a:r>
+            <a:br>
+              <a:rPr lang="ru-RU" sz="1600" b="1" dirty="0"/>
+            </a:br>
+            <a:r>
+              <a:rPr lang="ru-RU" sz="1600" b="1" dirty="0"/>
+              <a:t>ИМ. Б.Л. РОЗИНГА (ФИЛИАЛ) СПбГУТ </a:t>
+            </a:r>
+            <a:br>
+              <a:rPr lang="ru-RU" sz="1600" b="1" dirty="0"/>
+            </a:br>
+            <a:r>
+              <a:rPr lang="ru-RU" sz="1600" b="1" dirty="0"/>
+              <a:t>(АКТ (ф) СПбГУТ) </a:t>
+            </a:r>
+            <a:endParaRPr lang="en-US" sz="1600" b="1" dirty="0"/>
+          </a:p>
+        </p:txBody>
+      </p:sp>
+      <p:sp>
+        <p:nvSpPr>
+          <p:cNvPr id="24" name="TextBox 23">
+            <a:extLst>
+              <a:ext uri="{FF2B5EF4-FFF2-40B4-BE49-F238E27FC236}">
+                <a16:creationId xmlns:a16="http://schemas.microsoft.com/office/drawing/2014/main" id="{28129A70-40A9-97E6-8158-A8661A658A4D}"/>
+              </a:ext>
+            </a:extLst>
+          </p:cNvPr>
+          <p:cNvSpPr txBox="1"/>
+          <p:nvPr/>
+        </p:nvSpPr>
+        <p:spPr>
+          <a:xfrm>
+            <a:off x="1831648" y="2473076"/>
+            <a:ext cx="8528703" cy="461665"/>
+          </a:xfrm>
+          <a:prstGeom prst="rect">
+            <a:avLst/>
+          </a:prstGeom>
+          <a:noFill/>
+        </p:spPr>
+        <p:txBody>
+          <a:bodyPr wrap="square" rtlCol="0">
+            <a:spAutoFit/>
+          </a:bodyPr>
+          <a:lstStyle/>
+          <a:p>
+            <a:pPr algn="ctr"/>
+            <a:r>
+              <a:rPr lang="ru-RU" sz="2400" b="1" dirty="0">
+                <a:ea typeface="Verdana" panose="020B0604030504040204" pitchFamily="34" charset="0"/>
+              </a:rPr>
+              <a:t>ДИПЛОМНЫЙ ПРОЕКТ</a:t>
+            </a:r>
+            <a:endParaRPr lang="ru-RU" sz="2400" b="1" dirty="0"/>
+          </a:p>
+        </p:txBody>
+      </p:sp>
+      <p:sp>
+        <p:nvSpPr>
+          <p:cNvPr id="25" name="TextBox 24">
+            <a:extLst>
+              <a:ext uri="{FF2B5EF4-FFF2-40B4-BE49-F238E27FC236}">
+                <a16:creationId xmlns:a16="http://schemas.microsoft.com/office/drawing/2014/main" id="{F508F988-A29F-A789-2B8F-5F13D806E266}"/>
+              </a:ext>
+            </a:extLst>
+          </p:cNvPr>
+          <p:cNvSpPr txBox="1"/>
+          <p:nvPr/>
+        </p:nvSpPr>
+        <p:spPr>
+          <a:xfrm>
+            <a:off x="-1609725" y="3264191"/>
+            <a:ext cx="14592300" cy="830997"/>
+          </a:xfrm>
+          <a:prstGeom prst="rect">
+            <a:avLst/>
+          </a:prstGeom>
+          <a:noFill/>
+        </p:spPr>
+        <p:txBody>
+          <a:bodyPr wrap="square" rtlCol="0">
+            <a:spAutoFit/>
+          </a:bodyPr>
+          <a:lstStyle/>
+          <a:p>
+            <a:pPr algn="ctr"/>
+            <a:r>
+              <a:rPr lang="ru-RU" sz="2400" b="1" dirty="0">
+                <a:ea typeface="Verdana" panose="020B0604030504040204" pitchFamily="34" charset="0"/>
+              </a:rPr>
+              <a:t>РАЗРАБОТКА ИНФОРМАЦИОННОЙ СИСТЕМЫ</a:t>
+            </a:r>
+          </a:p>
+          <a:p>
+            <a:pPr algn="ctr"/>
+            <a:r>
+              <a:rPr lang="ru-RU" sz="2400" b="1" dirty="0">
+                <a:ea typeface="Verdana" panose="020B0604030504040204" pitchFamily="34" charset="0"/>
+              </a:rPr>
+              <a:t>ДЛЯ ИЗУЧЕНИЯ ПРАВИЛ РУССКОГО ЯЗЫКА «ГРАММАРИУМ»</a:t>
+            </a:r>
+            <a:endParaRPr lang="ru-RU" sz="2400" b="1" dirty="0"/>
+          </a:p>
+        </p:txBody>
+      </p:sp>
+      <p:sp>
+        <p:nvSpPr>
+          <p:cNvPr id="26" name="TextBox 25">
+            <a:extLst>
+              <a:ext uri="{FF2B5EF4-FFF2-40B4-BE49-F238E27FC236}">
+                <a16:creationId xmlns:a16="http://schemas.microsoft.com/office/drawing/2014/main" id="{656445F3-FE04-ED86-447F-D33A81725C7D}"/>
+              </a:ext>
+            </a:extLst>
+          </p:cNvPr>
+          <p:cNvSpPr txBox="1"/>
+          <p:nvPr/>
+        </p:nvSpPr>
+        <p:spPr>
+          <a:xfrm>
+            <a:off x="299100" y="4672584"/>
+            <a:ext cx="6215999" cy="584775"/>
+          </a:xfrm>
+          <a:prstGeom prst="rect">
+            <a:avLst/>
+          </a:prstGeom>
+          <a:noFill/>
+        </p:spPr>
+        <p:txBody>
+          <a:bodyPr wrap="square" rtlCol="0">
+            <a:spAutoFit/>
+          </a:bodyPr>
+          <a:lstStyle/>
+          <a:p>
+            <a:r>
+              <a:rPr lang="ru-RU" sz="1600" b="1" dirty="0">
+                <a:ea typeface="Verdana" panose="020B0604030504040204" pitchFamily="34" charset="0"/>
+              </a:rPr>
+              <a:t>Дипломник </a:t>
+            </a:r>
+          </a:p>
+          <a:p>
+            <a:r>
+              <a:rPr lang="ru-RU" sz="1600" dirty="0" err="1">
+                <a:ea typeface="Verdana" panose="020B0604030504040204" pitchFamily="34" charset="0"/>
+              </a:rPr>
+              <a:t>Вепрёв</a:t>
+            </a:r>
+            <a:r>
+              <a:rPr lang="ru-RU" sz="1600" dirty="0">
+                <a:ea typeface="Verdana" panose="020B0604030504040204" pitchFamily="34" charset="0"/>
+              </a:rPr>
+              <a:t> Александр Михайлович </a:t>
+            </a:r>
+            <a:endParaRPr lang="ru-RU" sz="1600" dirty="0"/>
+          </a:p>
+        </p:txBody>
+      </p:sp>
+      <p:sp>
+        <p:nvSpPr>
+          <p:cNvPr id="28" name="TextBox 27">
+            <a:extLst>
+              <a:ext uri="{FF2B5EF4-FFF2-40B4-BE49-F238E27FC236}">
+                <a16:creationId xmlns:a16="http://schemas.microsoft.com/office/drawing/2014/main" id="{674FFBA4-F36A-A395-8992-3C4F95CECFA7}"/>
+              </a:ext>
+            </a:extLst>
+          </p:cNvPr>
+          <p:cNvSpPr txBox="1"/>
+          <p:nvPr/>
+        </p:nvSpPr>
+        <p:spPr>
+          <a:xfrm>
+            <a:off x="299100" y="5352916"/>
+            <a:ext cx="5888052" cy="584775"/>
+          </a:xfrm>
+          <a:prstGeom prst="rect">
+            <a:avLst/>
+          </a:prstGeom>
+          <a:noFill/>
+        </p:spPr>
+        <p:txBody>
+          <a:bodyPr wrap="square" rtlCol="0">
+            <a:spAutoFit/>
+          </a:bodyPr>
+          <a:lstStyle/>
+          <a:p>
+            <a:r>
+              <a:rPr lang="ru-RU" sz="1600" b="1" dirty="0">
+                <a:ea typeface="Verdana" panose="020B0604030504040204" pitchFamily="34" charset="0"/>
+              </a:rPr>
+              <a:t>Дипломный руководитель</a:t>
+            </a:r>
+          </a:p>
+          <a:p>
+            <a:r>
+              <a:rPr lang="ru-RU" sz="1600" dirty="0">
+                <a:ea typeface="Verdana" panose="020B0604030504040204" pitchFamily="34" charset="0"/>
+              </a:rPr>
+              <a:t>Старостина Вера Валерьевна</a:t>
+            </a:r>
+            <a:endParaRPr lang="ru-RU" sz="1600" dirty="0"/>
+          </a:p>
+        </p:txBody>
+      </p:sp>
+      <p:sp>
+        <p:nvSpPr>
+          <p:cNvPr id="29" name="TextBox 28">
+            <a:extLst>
+              <a:ext uri="{FF2B5EF4-FFF2-40B4-BE49-F238E27FC236}">
+                <a16:creationId xmlns:a16="http://schemas.microsoft.com/office/drawing/2014/main" id="{B1C9ECBD-0FBE-9B97-3B54-1F1CB1DDAD32}"/>
+              </a:ext>
+            </a:extLst>
+          </p:cNvPr>
+          <p:cNvSpPr txBox="1"/>
+          <p:nvPr/>
+        </p:nvSpPr>
+        <p:spPr>
+          <a:xfrm>
+            <a:off x="3151975" y="6426436"/>
+            <a:ext cx="5888052" cy="338554"/>
+          </a:xfrm>
+          <a:prstGeom prst="rect">
+            <a:avLst/>
+          </a:prstGeom>
+          <a:noFill/>
+        </p:spPr>
+        <p:txBody>
+          <a:bodyPr wrap="square" rtlCol="0">
+            <a:spAutoFit/>
+          </a:bodyPr>
+          <a:lstStyle/>
+          <a:p>
+            <a:pPr algn="ctr"/>
+            <a:r>
+              <a:rPr lang="ru-RU" sz="1600" dirty="0">
+                <a:ea typeface="Verdana" panose="020B0604030504040204" pitchFamily="34" charset="0"/>
+              </a:rPr>
+              <a:t>Архангельск 2026</a:t>
+            </a:r>
+            <a:endParaRPr lang="ru-RU" sz="1600" dirty="0"/>
+          </a:p>
+        </p:txBody>
+      </p:sp>
+      <p:sp>
+        <p:nvSpPr>
+          <p:cNvPr id="31" name="Овал 30">
+            <a:extLst>
+              <a:ext uri="{FF2B5EF4-FFF2-40B4-BE49-F238E27FC236}">
+                <a16:creationId xmlns:a16="http://schemas.microsoft.com/office/drawing/2014/main" id="{5AE369CE-41EA-1633-FD0D-238019E1BEAC}"/>
+              </a:ext>
+            </a:extLst>
+          </p:cNvPr>
+          <p:cNvSpPr/>
+          <p:nvPr/>
+        </p:nvSpPr>
+        <p:spPr>
+          <a:xfrm>
+            <a:off x="10963275" y="2604460"/>
+            <a:ext cx="2457450" cy="2457450"/>
+          </a:xfrm>
+          <a:prstGeom prst="ellipse">
+            <a:avLst/>
+          </a:prstGeom>
+          <a:solidFill>
+            <a:schemeClr val="accent1">
+              <a:lumMod val="60000"/>
+              <a:lumOff val="40000"/>
+            </a:schemeClr>
+          </a:solidFill>
+          <a:ln>
+            <a:solidFill>
+              <a:schemeClr val="accent1"/>
+            </a:solidFill>
+          </a:ln>
+        </p:spPr>
+        <p:style>
+          <a:lnRef idx="2">
+            <a:schemeClr val="dk1"/>
+          </a:lnRef>
+          <a:fillRef idx="1">
+            <a:schemeClr val="lt1"/>
+          </a:fillRef>
+          <a:effectRef idx="0">
+            <a:schemeClr val="dk1"/>
+          </a:effectRef>
+          <a:fontRef idx="minor">
+            <a:schemeClr val="dk1"/>
+          </a:fontRef>
+        </p:style>
+        <p:txBody>
+          <a:bodyPr rtlCol="0" anchor="ctr"/>
+          <a:lstStyle/>
+          <a:p>
+            <a:pPr algn="ctr"/>
+            <a:endParaRPr lang="ru-RU"/>
+          </a:p>
+        </p:txBody>
+      </p:sp>
+    </p:spTree>
+    <p:extLst>
+      <p:ext uri="{BB962C8B-B14F-4D97-AF65-F5344CB8AC3E}">
+        <p14:creationId xmlns:p14="http://schemas.microsoft.com/office/powerpoint/2010/main" val="4250463745"/>
       </p:ext>
     </p:extLst>
   </p:cSld>

--- a/презентация.pptx
+++ b/презентация.pptx
@@ -16,7 +16,7 @@
     <p:sldId id="269" r:id="rId7"/>
     <p:sldId id="272" r:id="rId8"/>
     <p:sldId id="273" r:id="rId9"/>
-    <p:sldId id="274" r:id="rId10"/>
+    <p:sldId id="277" r:id="rId10"/>
   </p:sldIdLst>
   <p:sldSz cx="12192000" cy="6858000"/>
   <p:notesSz cx="6858000" cy="12192000"/>
@@ -991,7 +991,7 @@
     </p:spTree>
     <p:extLst>
       <p:ext uri="{BB962C8B-B14F-4D97-AF65-F5344CB8AC3E}">
-        <p14:creationId xmlns:p14="http://schemas.microsoft.com/office/powerpoint/2010/main" val="2585686344"/>
+        <p14:creationId xmlns:p14="http://schemas.microsoft.com/office/powerpoint/2010/main" val="1144746595"/>
       </p:ext>
     </p:extLst>
   </p:cSld>
@@ -1605,8 +1605,8 @@
         </p:nvSpPr>
         <p:spPr>
           <a:xfrm>
-            <a:off x="-1609725" y="3264191"/>
-            <a:ext cx="14592300" cy="830997"/>
+            <a:off x="1508789" y="3264191"/>
+            <a:ext cx="9356725" cy="830997"/>
           </a:xfrm>
           <a:prstGeom prst="rect">
             <a:avLst/>
@@ -1653,8 +1653,8 @@
         </p:nvSpPr>
         <p:spPr>
           <a:xfrm>
-            <a:off x="299100" y="4672584"/>
-            <a:ext cx="6215999" cy="584775"/>
+            <a:off x="299100" y="4571236"/>
+            <a:ext cx="6215999" cy="646331"/>
           </a:xfrm>
           <a:prstGeom prst="rect">
             <a:avLst/>
@@ -1668,7 +1668,7 @@
           <a:lstStyle/>
           <a:p>
             <a:r>
-              <a:rPr lang="ru-RU" sz="1600" b="1" dirty="0">
+              <a:rPr lang="ru-RU" b="1" dirty="0">
                 <a:ea typeface="Verdana" panose="020B0604030504040204" pitchFamily="34" charset="0"/>
               </a:rPr>
               <a:t>Дипломник </a:t>
@@ -1676,18 +1676,18 @@
           </a:p>
           <a:p>
             <a:r>
-              <a:rPr lang="ru-RU" sz="1600" dirty="0" err="1">
+              <a:rPr lang="ru-RU" dirty="0" err="1">
                 <a:ea typeface="Verdana" panose="020B0604030504040204" pitchFamily="34" charset="0"/>
               </a:rPr>
               <a:t>Вепрёв</a:t>
             </a:r>
             <a:r>
-              <a:rPr lang="ru-RU" sz="1600" dirty="0">
+              <a:rPr lang="ru-RU" dirty="0">
                 <a:ea typeface="Verdana" panose="020B0604030504040204" pitchFamily="34" charset="0"/>
               </a:rPr>
               <a:t> Александр Михайлович </a:t>
             </a:r>
-            <a:endParaRPr lang="ru-RU" sz="1600" dirty="0"/>
+            <a:endParaRPr lang="ru-RU" dirty="0"/>
           </a:p>
         </p:txBody>
       </p:sp>
@@ -1705,8 +1705,8 @@
         </p:nvSpPr>
         <p:spPr>
           <a:xfrm>
-            <a:off x="299100" y="5352916"/>
-            <a:ext cx="5888052" cy="584775"/>
+            <a:off x="299100" y="5291360"/>
+            <a:ext cx="5888052" cy="646331"/>
           </a:xfrm>
           <a:prstGeom prst="rect">
             <a:avLst/>
@@ -1720,7 +1720,7 @@
           <a:lstStyle/>
           <a:p>
             <a:r>
-              <a:rPr lang="ru-RU" sz="1600" b="1" dirty="0">
+              <a:rPr lang="ru-RU" b="1" dirty="0">
                 <a:ea typeface="Verdana" panose="020B0604030504040204" pitchFamily="34" charset="0"/>
               </a:rPr>
               <a:t>Дипломный руководитель</a:t>
@@ -1728,12 +1728,12 @@
           </a:p>
           <a:p>
             <a:r>
-              <a:rPr lang="ru-RU" sz="1600" dirty="0">
+              <a:rPr lang="ru-RU" dirty="0">
                 <a:ea typeface="Verdana" panose="020B0604030504040204" pitchFamily="34" charset="0"/>
               </a:rPr>
               <a:t>Старостина Вера Валерьевна</a:t>
             </a:r>
-            <a:endParaRPr lang="ru-RU" sz="1600" dirty="0"/>
+            <a:endParaRPr lang="ru-RU" dirty="0"/>
           </a:p>
         </p:txBody>
       </p:sp>
@@ -1948,7 +1948,18 @@
                 <a:ea typeface="Aptos" pitchFamily="34" charset="-122"/>
                 <a:cs typeface="Aptos" pitchFamily="34" charset="-120"/>
               </a:rPr>
-              <a:t>02/09</a:t>
+              <a:t>02/0</a:t>
+            </a:r>
+            <a:r>
+              <a:rPr lang="ru-RU" sz="3600" b="1" dirty="0">
+                <a:solidFill>
+                  <a:srgbClr val="B8B8B8"/>
+                </a:solidFill>
+                <a:latin typeface="Aptos" pitchFamily="34" charset="0"/>
+                <a:ea typeface="Aptos" pitchFamily="34" charset="-122"/>
+                <a:cs typeface="Aptos" pitchFamily="34" charset="-120"/>
+              </a:rPr>
+              <a:t>8</a:t>
             </a:r>
             <a:endParaRPr lang="en-US" sz="3600" dirty="0"/>
           </a:p>
@@ -1968,7 +1979,7 @@
         </p:nvSpPr>
         <p:spPr>
           <a:xfrm>
-            <a:off x="-1228725" y="2558357"/>
+            <a:off x="-1555222" y="2676397"/>
             <a:ext cx="2457450" cy="2457450"/>
           </a:xfrm>
           <a:prstGeom prst="ellipse">
@@ -2023,7 +2034,7 @@
         </p:nvSpPr>
         <p:spPr>
           <a:xfrm>
-            <a:off x="4539763" y="5716524"/>
+            <a:off x="4846949" y="5767598"/>
             <a:ext cx="2457450" cy="2457450"/>
           </a:xfrm>
           <a:prstGeom prst="ellipse">
@@ -2078,7 +2089,7 @@
         </p:nvSpPr>
         <p:spPr>
           <a:xfrm>
-            <a:off x="11051199" y="1122016"/>
+            <a:off x="11410950" y="1432366"/>
             <a:ext cx="2457450" cy="2457450"/>
           </a:xfrm>
           <a:prstGeom prst="ellipse">
@@ -2119,12 +2130,84 @@
           </a:p>
         </p:txBody>
       </p:sp>
+      <p:sp>
+        <p:nvSpPr>
+          <p:cNvPr id="17" name="TextBox 16">
+            <a:extLst>
+              <a:ext uri="{FF2B5EF4-FFF2-40B4-BE49-F238E27FC236}">
+                <a16:creationId xmlns:a16="http://schemas.microsoft.com/office/drawing/2014/main" id="{497754BA-8740-3DD2-E245-C6042FA99E0D}"/>
+              </a:ext>
+            </a:extLst>
+          </p:cNvPr>
+          <p:cNvSpPr txBox="1"/>
+          <p:nvPr/>
+        </p:nvSpPr>
+        <p:spPr>
+          <a:xfrm>
+            <a:off x="902228" y="1195741"/>
+            <a:ext cx="4573407" cy="584775"/>
+          </a:xfrm>
+          <a:prstGeom prst="rect">
+            <a:avLst/>
+          </a:prstGeom>
+          <a:noFill/>
+        </p:spPr>
+        <p:txBody>
+          <a:bodyPr wrap="square">
+            <a:spAutoFit/>
+          </a:bodyPr>
+          <a:lstStyle/>
+          <a:p>
+            <a:pPr algn="ctr"/>
+            <a:r>
+              <a:rPr lang="ru-RU" sz="3200" dirty="0"/>
+              <a:t> Студенты </a:t>
+            </a:r>
+          </a:p>
+        </p:txBody>
+      </p:sp>
+      <p:sp>
+        <p:nvSpPr>
+          <p:cNvPr id="18" name="TextBox 17">
+            <a:extLst>
+              <a:ext uri="{FF2B5EF4-FFF2-40B4-BE49-F238E27FC236}">
+                <a16:creationId xmlns:a16="http://schemas.microsoft.com/office/drawing/2014/main" id="{DED50CE0-F4D2-0820-B22B-CC3B8212ABAE}"/>
+              </a:ext>
+            </a:extLst>
+          </p:cNvPr>
+          <p:cNvSpPr txBox="1"/>
+          <p:nvPr/>
+        </p:nvSpPr>
+        <p:spPr>
+          <a:xfrm>
+            <a:off x="5891022" y="1030477"/>
+            <a:ext cx="4573407" cy="1077218"/>
+          </a:xfrm>
+          <a:prstGeom prst="rect">
+            <a:avLst/>
+          </a:prstGeom>
+          <a:noFill/>
+        </p:spPr>
+        <p:txBody>
+          <a:bodyPr wrap="square">
+            <a:spAutoFit/>
+          </a:bodyPr>
+          <a:lstStyle/>
+          <a:p>
+            <a:pPr algn="ctr"/>
+            <a:r>
+              <a:rPr lang="ru-RU" sz="3200" dirty="0"/>
+              <a:t>Преподаватели русского языка</a:t>
+            </a:r>
+          </a:p>
+        </p:txBody>
+      </p:sp>
       <p:pic>
         <p:nvPicPr>
-          <p:cNvPr id="1032" name="Picture 8" descr="Picture background">
+          <p:cNvPr id="1026" name="Picture 2" descr="Picture background">
             <a:extLst>
               <a:ext uri="{FF2B5EF4-FFF2-40B4-BE49-F238E27FC236}">
-                <a16:creationId xmlns:a16="http://schemas.microsoft.com/office/drawing/2014/main" id="{AC212671-FED1-90A4-3B63-20198A23A946}"/>
+                <a16:creationId xmlns:a16="http://schemas.microsoft.com/office/drawing/2014/main" id="{44F9485E-CF47-51CD-E7EE-73C549D141C6}"/>
               </a:ext>
             </a:extLst>
           </p:cNvPr>
@@ -2148,8 +2231,8 @@
         </p:blipFill>
         <p:spPr bwMode="auto">
           <a:xfrm>
-            <a:off x="6597646" y="2196732"/>
-            <a:ext cx="4153654" cy="3415262"/>
+            <a:off x="-5321830" y="303276"/>
+            <a:ext cx="3153132" cy="3153132"/>
           </a:xfrm>
           <a:prstGeom prst="rect">
             <a:avLst/>
@@ -2166,84 +2249,12 @@
           </a:extLst>
         </p:spPr>
       </p:pic>
-      <p:sp>
-        <p:nvSpPr>
-          <p:cNvPr id="17" name="TextBox 16">
-            <a:extLst>
-              <a:ext uri="{FF2B5EF4-FFF2-40B4-BE49-F238E27FC236}">
-                <a16:creationId xmlns:a16="http://schemas.microsoft.com/office/drawing/2014/main" id="{497754BA-8740-3DD2-E245-C6042FA99E0D}"/>
-              </a:ext>
-            </a:extLst>
-          </p:cNvPr>
-          <p:cNvSpPr txBox="1"/>
-          <p:nvPr/>
-        </p:nvSpPr>
-        <p:spPr>
-          <a:xfrm>
-            <a:off x="902228" y="1195741"/>
-            <a:ext cx="4573407" cy="584775"/>
-          </a:xfrm>
-          <a:prstGeom prst="rect">
-            <a:avLst/>
-          </a:prstGeom>
-          <a:noFill/>
-        </p:spPr>
-        <p:txBody>
-          <a:bodyPr wrap="square">
-            <a:spAutoFit/>
-          </a:bodyPr>
-          <a:lstStyle/>
-          <a:p>
-            <a:pPr algn="ctr"/>
-            <a:r>
-              <a:rPr lang="ru-RU" sz="3200" dirty="0"/>
-              <a:t> Студенты </a:t>
-            </a:r>
-          </a:p>
-        </p:txBody>
-      </p:sp>
-      <p:sp>
-        <p:nvSpPr>
-          <p:cNvPr id="18" name="TextBox 17">
-            <a:extLst>
-              <a:ext uri="{FF2B5EF4-FFF2-40B4-BE49-F238E27FC236}">
-                <a16:creationId xmlns:a16="http://schemas.microsoft.com/office/drawing/2014/main" id="{DED50CE0-F4D2-0820-B22B-CC3B8212ABAE}"/>
-              </a:ext>
-            </a:extLst>
-          </p:cNvPr>
-          <p:cNvSpPr txBox="1"/>
-          <p:nvPr/>
-        </p:nvSpPr>
-        <p:spPr>
-          <a:xfrm>
-            <a:off x="6423514" y="1014984"/>
-            <a:ext cx="3803172" cy="1077218"/>
-          </a:xfrm>
-          <a:prstGeom prst="rect">
-            <a:avLst/>
-          </a:prstGeom>
-          <a:noFill/>
-        </p:spPr>
-        <p:txBody>
-          <a:bodyPr wrap="square">
-            <a:spAutoFit/>
-          </a:bodyPr>
-          <a:lstStyle/>
-          <a:p>
-            <a:pPr algn="ctr"/>
-            <a:r>
-              <a:rPr lang="ru-RU" sz="3200" dirty="0"/>
-              <a:t>Преподаватели русского языка</a:t>
-            </a:r>
-          </a:p>
-        </p:txBody>
-      </p:sp>
       <p:pic>
         <p:nvPicPr>
-          <p:cNvPr id="1026" name="Picture 2" descr="Picture background">
+          <p:cNvPr id="1038" name="Picture 14" descr="Изображение пина-истории">
             <a:extLst>
               <a:ext uri="{FF2B5EF4-FFF2-40B4-BE49-F238E27FC236}">
-                <a16:creationId xmlns:a16="http://schemas.microsoft.com/office/drawing/2014/main" id="{44F9485E-CF47-51CD-E7EE-73C549D141C6}"/>
+                <a16:creationId xmlns:a16="http://schemas.microsoft.com/office/drawing/2014/main" id="{2AA17070-3350-FE8E-A570-F80A93B8DA51}"/>
               </a:ext>
             </a:extLst>
           </p:cNvPr>
@@ -2267,8 +2278,55 @@
         </p:blipFill>
         <p:spPr bwMode="auto">
           <a:xfrm>
-            <a:off x="1693817" y="2197491"/>
+            <a:off x="1515704" y="2313250"/>
             <a:ext cx="3153132" cy="3153132"/>
+          </a:xfrm>
+          <a:prstGeom prst="rect">
+            <a:avLst/>
+          </a:prstGeom>
+          <a:noFill/>
+          <a:extLst>
+            <a:ext uri="{909E8E84-426E-40DD-AFC4-6F175D3DCCD1}">
+              <a14:hiddenFill xmlns:a14="http://schemas.microsoft.com/office/drawing/2010/main">
+                <a:solidFill>
+                  <a:srgbClr val="FFFFFF"/>
+                </a:solidFill>
+              </a14:hiddenFill>
+            </a:ext>
+          </a:extLst>
+        </p:spPr>
+      </p:pic>
+      <p:pic>
+        <p:nvPicPr>
+          <p:cNvPr id="4" name="Picture 2" descr="Picture background">
+            <a:extLst>
+              <a:ext uri="{FF2B5EF4-FFF2-40B4-BE49-F238E27FC236}">
+                <a16:creationId xmlns:a16="http://schemas.microsoft.com/office/drawing/2014/main" id="{66F52A69-2CC6-521C-3A21-9998C5A973C0}"/>
+              </a:ext>
+            </a:extLst>
+          </p:cNvPr>
+          <p:cNvPicPr>
+            <a:picLocks noChangeAspect="1" noChangeArrowheads="1"/>
+          </p:cNvPicPr>
+          <p:nvPr/>
+        </p:nvPicPr>
+        <p:blipFill>
+          <a:blip r:embed="rId5">
+            <a:extLst>
+              <a:ext uri="{28A0092B-C50C-407E-A947-70E740481C1C}">
+                <a14:useLocalDpi xmlns:a14="http://schemas.microsoft.com/office/drawing/2010/main" val="0"/>
+              </a:ext>
+            </a:extLst>
+          </a:blip>
+          <a:srcRect/>
+          <a:stretch>
+            <a:fillRect/>
+          </a:stretch>
+        </p:blipFill>
+        <p:spPr bwMode="auto">
+          <a:xfrm>
+            <a:off x="6300979" y="2107695"/>
+            <a:ext cx="3763905" cy="3564241"/>
           </a:xfrm>
           <a:prstGeom prst="rect">
             <a:avLst/>
@@ -2410,7 +2468,18 @@
                 <a:ea typeface="Aptos" pitchFamily="34" charset="-122"/>
                 <a:cs typeface="Aptos" pitchFamily="34" charset="-120"/>
               </a:rPr>
-              <a:t>03/09</a:t>
+              <a:t>03/0</a:t>
+            </a:r>
+            <a:r>
+              <a:rPr lang="ru-RU" sz="3600" b="1" dirty="0">
+                <a:solidFill>
+                  <a:srgbClr val="B8B8B8"/>
+                </a:solidFill>
+                <a:latin typeface="Aptos" pitchFamily="34" charset="0"/>
+                <a:ea typeface="Aptos" pitchFamily="34" charset="-122"/>
+                <a:cs typeface="Aptos" pitchFamily="34" charset="-120"/>
+              </a:rPr>
+              <a:t>8</a:t>
             </a:r>
             <a:endParaRPr lang="en-US" sz="3600" dirty="0"/>
           </a:p>
@@ -2430,7 +2499,7 @@
         </p:nvGrpSpPr>
         <p:grpSpPr>
           <a:xfrm>
-            <a:off x="363114" y="1602221"/>
+            <a:off x="363114" y="1823139"/>
             <a:ext cx="5420572" cy="1112737"/>
             <a:chOff x="2412754" y="2109123"/>
             <a:chExt cx="8384467" cy="3998961"/>
@@ -2537,7 +2606,7 @@
         </p:nvGrpSpPr>
         <p:grpSpPr>
           <a:xfrm>
-            <a:off x="6408314" y="1602222"/>
+            <a:off x="6408314" y="1823140"/>
             <a:ext cx="5420572" cy="1112737"/>
             <a:chOff x="2412754" y="2109123"/>
             <a:chExt cx="8384467" cy="3998961"/>
@@ -2644,7 +2713,7 @@
         </p:nvGrpSpPr>
         <p:grpSpPr>
           <a:xfrm>
-            <a:off x="363113" y="4514937"/>
+            <a:off x="363113" y="4284103"/>
             <a:ext cx="5420572" cy="1112737"/>
             <a:chOff x="2412754" y="2109123"/>
             <a:chExt cx="8384467" cy="3998961"/>
@@ -2751,7 +2820,7 @@
         </p:nvGrpSpPr>
         <p:grpSpPr>
           <a:xfrm>
-            <a:off x="6408314" y="4514936"/>
+            <a:off x="6408314" y="4284102"/>
             <a:ext cx="5420572" cy="1112737"/>
             <a:chOff x="2412754" y="2109123"/>
             <a:chExt cx="8384467" cy="3998961"/>
@@ -2907,7 +2976,7 @@
         </p:nvSpPr>
         <p:spPr>
           <a:xfrm>
-            <a:off x="291465" y="265177"/>
+            <a:off x="456565" y="265176"/>
             <a:ext cx="5029200" cy="219456"/>
           </a:xfrm>
           <a:prstGeom prst="rect">
@@ -2941,8 +3010,8 @@
         </p:nvSpPr>
         <p:spPr>
           <a:xfrm>
-            <a:off x="2004551" y="2483124"/>
-            <a:ext cx="8182592" cy="2141689"/>
+            <a:off x="1945969" y="1878371"/>
+            <a:ext cx="8300062" cy="3589058"/>
           </a:xfrm>
           <a:prstGeom prst="roundRect">
             <a:avLst>
@@ -2987,8 +3056,8 @@
         </p:nvSpPr>
         <p:spPr>
           <a:xfrm>
-            <a:off x="2510825" y="2571982"/>
-            <a:ext cx="7170044" cy="1894621"/>
+            <a:off x="1993955" y="2365138"/>
+            <a:ext cx="7912473" cy="2615524"/>
           </a:xfrm>
           <a:prstGeom prst="rect">
             <a:avLst/>
@@ -3007,15 +3076,15 @@
               </a:lnSpc>
             </a:pPr>
             <a:r>
-              <a:rPr lang="ru-RU" sz="2000" kern="100" dirty="0">
+              <a:rPr lang="ru-RU" sz="2800" kern="100" dirty="0">
                 <a:effectLst/>
                 <a:ea typeface="Calibri" panose="020F0502020204030204" pitchFamily="34" charset="0"/>
                 <a:cs typeface="Times New Roman" panose="02020603050405020304" pitchFamily="18" charset="0"/>
               </a:rPr>
-              <a:t>Целью дипломного проектирования является разработка информационной системы «</a:t>
+              <a:t>Разработка информационной системы «</a:t>
             </a:r>
             <a:r>
-              <a:rPr lang="ru-RU" sz="2000" kern="100" dirty="0" err="1">
+              <a:rPr lang="ru-RU" sz="2800" kern="100" dirty="0" err="1">
                 <a:effectLst/>
                 <a:ea typeface="Calibri" panose="020F0502020204030204" pitchFamily="34" charset="0"/>
                 <a:cs typeface="Times New Roman" panose="02020603050405020304" pitchFamily="18" charset="0"/>
@@ -3023,7 +3092,7 @@
               <a:t>Граммариум</a:t>
             </a:r>
             <a:r>
-              <a:rPr lang="ru-RU" sz="2000" kern="100" dirty="0">
+              <a:rPr lang="ru-RU" sz="2800" kern="100" dirty="0">
                 <a:effectLst/>
                 <a:ea typeface="Calibri" panose="020F0502020204030204" pitchFamily="34" charset="0"/>
                 <a:cs typeface="Times New Roman" panose="02020603050405020304" pitchFamily="18" charset="0"/>
@@ -3062,7 +3131,7 @@
         </p:blipFill>
         <p:spPr bwMode="auto">
           <a:xfrm>
-            <a:off x="9753587" y="1998012"/>
+            <a:off x="9562111" y="1620117"/>
             <a:ext cx="1147940" cy="1147940"/>
           </a:xfrm>
           <a:prstGeom prst="rect">
@@ -3141,7 +3210,18 @@
                 <a:ea typeface="Aptos" pitchFamily="34" charset="-122"/>
                 <a:cs typeface="Aptos" pitchFamily="34" charset="-120"/>
               </a:rPr>
-              <a:t>/09</a:t>
+              <a:t>/0</a:t>
+            </a:r>
+            <a:r>
+              <a:rPr lang="ru-RU" sz="3600" b="1" dirty="0">
+                <a:solidFill>
+                  <a:srgbClr val="B8B8B8"/>
+                </a:solidFill>
+                <a:latin typeface="Aptos" pitchFamily="34" charset="0"/>
+                <a:ea typeface="Aptos" pitchFamily="34" charset="-122"/>
+                <a:cs typeface="Aptos" pitchFamily="34" charset="-120"/>
+              </a:rPr>
+              <a:t>8</a:t>
             </a:r>
             <a:endParaRPr lang="en-US" sz="3600" dirty="0"/>
           </a:p>
@@ -3372,7 +3452,6 @@
                 <a:solidFill>
                   <a:srgbClr val="B8B8B8"/>
                 </a:solidFill>
-                <a:latin typeface="Bahnschrift Light" panose="020B0502040204020203" pitchFamily="34" charset="0"/>
                 <a:ea typeface="Aptos" pitchFamily="34" charset="-122"/>
                 <a:cs typeface="Aptos" pitchFamily="34" charset="-120"/>
               </a:rPr>
@@ -3383,7 +3462,6 @@
                 <a:solidFill>
                   <a:srgbClr val="B8B8B8"/>
                 </a:solidFill>
-                <a:latin typeface="Bahnschrift Light" panose="020B0502040204020203" pitchFamily="34" charset="0"/>
                 <a:ea typeface="Aptos" pitchFamily="34" charset="-122"/>
                 <a:cs typeface="Aptos" pitchFamily="34" charset="-120"/>
               </a:rPr>
@@ -3394,15 +3472,22 @@
                 <a:solidFill>
                   <a:srgbClr val="B8B8B8"/>
                 </a:solidFill>
-                <a:latin typeface="Bahnschrift Light" panose="020B0502040204020203" pitchFamily="34" charset="0"/>
                 <a:ea typeface="Aptos" pitchFamily="34" charset="-122"/>
                 <a:cs typeface="Aptos" pitchFamily="34" charset="-120"/>
               </a:rPr>
-              <a:t>/09</a:t>
+              <a:t>/0</a:t>
             </a:r>
-            <a:endParaRPr lang="en-US" sz="3600" dirty="0">
-              <a:latin typeface="Bahnschrift Light" panose="020B0502040204020203" pitchFamily="34" charset="0"/>
-            </a:endParaRPr>
+            <a:r>
+              <a:rPr lang="ru-RU" sz="3600" b="1" dirty="0">
+                <a:solidFill>
+                  <a:srgbClr val="B8B8B8"/>
+                </a:solidFill>
+                <a:ea typeface="Aptos" pitchFamily="34" charset="-122"/>
+                <a:cs typeface="Aptos" pitchFamily="34" charset="-120"/>
+              </a:rPr>
+              <a:t>8</a:t>
+            </a:r>
+            <a:endParaRPr lang="en-US" sz="3600" dirty="0"/>
           </a:p>
         </p:txBody>
       </p:sp>
@@ -4576,7 +4661,18 @@
                 <a:ea typeface="Aptos" pitchFamily="34" charset="-122"/>
                 <a:cs typeface="Aptos" pitchFamily="34" charset="-120"/>
               </a:rPr>
-              <a:t>/09</a:t>
+              <a:t>/0</a:t>
+            </a:r>
+            <a:r>
+              <a:rPr lang="ru-RU" sz="3600" b="1" dirty="0">
+                <a:solidFill>
+                  <a:srgbClr val="B8B8B8"/>
+                </a:solidFill>
+                <a:latin typeface="Aptos" pitchFamily="34" charset="0"/>
+                <a:ea typeface="Aptos" pitchFamily="34" charset="-122"/>
+                <a:cs typeface="Aptos" pitchFamily="34" charset="-120"/>
+              </a:rPr>
+              <a:t>8</a:t>
             </a:r>
             <a:endParaRPr lang="en-US" sz="3600" dirty="0"/>
           </a:p>
@@ -4645,7 +4741,7 @@
         </p:nvSpPr>
         <p:spPr>
           <a:xfrm>
-            <a:off x="507605" y="291072"/>
+            <a:off x="507605" y="265176"/>
             <a:ext cx="5029200" cy="219456"/>
           </a:xfrm>
           <a:prstGeom prst="rect">
@@ -4673,104 +4769,6 @@
           </a:p>
         </p:txBody>
       </p:sp>
-      <p:grpSp>
-        <p:nvGrpSpPr>
-          <p:cNvPr id="6" name="Группа 5">
-            <a:extLst>
-              <a:ext uri="{FF2B5EF4-FFF2-40B4-BE49-F238E27FC236}">
-                <a16:creationId xmlns:a16="http://schemas.microsoft.com/office/drawing/2014/main" id="{BB242B2E-D742-8095-214A-B6BB250D6203}"/>
-              </a:ext>
-            </a:extLst>
-          </p:cNvPr>
-          <p:cNvGrpSpPr/>
-          <p:nvPr/>
-        </p:nvGrpSpPr>
-        <p:grpSpPr>
-          <a:xfrm>
-            <a:off x="6298653" y="1735923"/>
-            <a:ext cx="3254949" cy="1546285"/>
-            <a:chOff x="2412753" y="2109123"/>
-            <a:chExt cx="8132621" cy="2766244"/>
-          </a:xfrm>
-          <a:solidFill>
-            <a:srgbClr val="92D050"/>
-          </a:solidFill>
-        </p:grpSpPr>
-        <p:sp>
-          <p:nvSpPr>
-            <p:cNvPr id="29" name="Shape 27"/>
-            <p:cNvSpPr/>
-            <p:nvPr/>
-          </p:nvSpPr>
-          <p:spPr>
-            <a:xfrm>
-              <a:off x="2412753" y="2109123"/>
-              <a:ext cx="8132621" cy="2766244"/>
-            </a:xfrm>
-            <a:prstGeom prst="roundRect">
-              <a:avLst>
-                <a:gd name="adj" fmla="val 4132"/>
-              </a:avLst>
-            </a:prstGeom>
-            <a:grpFill/>
-            <a:ln w="12700">
-              <a:solidFill>
-                <a:schemeClr val="accent6">
-                  <a:lumMod val="50000"/>
-                </a:schemeClr>
-              </a:solidFill>
-              <a:prstDash val="solid"/>
-            </a:ln>
-          </p:spPr>
-          <p:txBody>
-            <a:bodyPr/>
-            <a:lstStyle/>
-            <a:p>
-              <a:pPr algn="ctr"/>
-              <a:endParaRPr lang="ru-RU" sz="2400" dirty="0"/>
-            </a:p>
-          </p:txBody>
-        </p:sp>
-        <p:sp>
-          <p:nvSpPr>
-            <p:cNvPr id="4" name="TextBox 3">
-              <a:extLst>
-                <a:ext uri="{FF2B5EF4-FFF2-40B4-BE49-F238E27FC236}">
-                  <a16:creationId xmlns:a16="http://schemas.microsoft.com/office/drawing/2014/main" id="{D6DBC032-13FF-6847-79DE-D1DB066F3FE9}"/>
-                </a:ext>
-              </a:extLst>
-            </p:cNvPr>
-            <p:cNvSpPr txBox="1"/>
-            <p:nvPr/>
-          </p:nvSpPr>
-          <p:spPr>
-            <a:xfrm>
-              <a:off x="2644812" y="2253392"/>
-              <a:ext cx="7587567" cy="2477702"/>
-            </a:xfrm>
-            <a:prstGeom prst="rect">
-              <a:avLst/>
-            </a:prstGeom>
-            <a:grpFill/>
-            <a:ln>
-              <a:noFill/>
-            </a:ln>
-          </p:spPr>
-          <p:txBody>
-            <a:bodyPr wrap="square" rtlCol="0">
-              <a:spAutoFit/>
-            </a:bodyPr>
-            <a:lstStyle/>
-            <a:p>
-              <a:pPr algn="ctr"/>
-              <a:r>
-                <a:rPr lang="ru-RU" sz="2800" dirty="0"/>
-                <a:t>Личная статистика и рекомендации</a:t>
-              </a:r>
-            </a:p>
-          </p:txBody>
-        </p:sp>
-      </p:grpSp>
       <p:sp>
         <p:nvSpPr>
           <p:cNvPr id="5" name="Text 34">
@@ -4806,7 +4804,6 @@
                 <a:solidFill>
                   <a:srgbClr val="B8B8B8"/>
                 </a:solidFill>
-                <a:latin typeface="Bahnschrift Light" panose="020B0502040204020203" pitchFamily="34" charset="0"/>
                 <a:ea typeface="Aptos" pitchFamily="34" charset="-122"/>
                 <a:cs typeface="Aptos" pitchFamily="34" charset="-120"/>
               </a:rPr>
@@ -4817,7 +4814,6 @@
                 <a:solidFill>
                   <a:srgbClr val="B8B8B8"/>
                 </a:solidFill>
-                <a:latin typeface="Bahnschrift Light" panose="020B0502040204020203" pitchFamily="34" charset="0"/>
                 <a:ea typeface="Aptos" pitchFamily="34" charset="-122"/>
                 <a:cs typeface="Aptos" pitchFamily="34" charset="-120"/>
               </a:rPr>
@@ -4828,346 +4824,21 @@
                 <a:solidFill>
                   <a:srgbClr val="B8B8B8"/>
                 </a:solidFill>
-                <a:latin typeface="Bahnschrift Light" panose="020B0502040204020203" pitchFamily="34" charset="0"/>
                 <a:ea typeface="Aptos" pitchFamily="34" charset="-122"/>
                 <a:cs typeface="Aptos" pitchFamily="34" charset="-120"/>
               </a:rPr>
               <a:t>8</a:t>
             </a:r>
-            <a:endParaRPr lang="en-US" sz="3600" dirty="0">
-              <a:latin typeface="Bahnschrift Light" panose="020B0502040204020203" pitchFamily="34" charset="0"/>
-            </a:endParaRPr>
+            <a:endParaRPr lang="en-US" sz="3600" dirty="0"/>
           </a:p>
         </p:txBody>
       </p:sp>
-      <p:grpSp>
-        <p:nvGrpSpPr>
-          <p:cNvPr id="13" name="Группа 12">
+      <p:sp>
+        <p:nvSpPr>
+          <p:cNvPr id="32" name="Овал 31">
             <a:extLst>
               <a:ext uri="{FF2B5EF4-FFF2-40B4-BE49-F238E27FC236}">
-                <a16:creationId xmlns:a16="http://schemas.microsoft.com/office/drawing/2014/main" id="{4D52CDDF-295C-E77A-5259-7C2580CB2C8D}"/>
-              </a:ext>
-            </a:extLst>
-          </p:cNvPr>
-          <p:cNvGrpSpPr/>
-          <p:nvPr/>
-        </p:nvGrpSpPr>
-        <p:grpSpPr>
-          <a:xfrm>
-            <a:off x="2839310" y="3762631"/>
-            <a:ext cx="3254949" cy="1546285"/>
-            <a:chOff x="2517702" y="2061014"/>
-            <a:chExt cx="8132621" cy="2766244"/>
-          </a:xfrm>
-          <a:solidFill>
-            <a:srgbClr val="00B0F0"/>
-          </a:solidFill>
-        </p:grpSpPr>
-        <p:sp>
-          <p:nvSpPr>
-            <p:cNvPr id="14" name="Shape 27">
-              <a:extLst>
-                <a:ext uri="{FF2B5EF4-FFF2-40B4-BE49-F238E27FC236}">
-                  <a16:creationId xmlns:a16="http://schemas.microsoft.com/office/drawing/2014/main" id="{03757012-3530-EBCF-374A-CC6F1D1E4ACC}"/>
-                </a:ext>
-              </a:extLst>
-            </p:cNvPr>
-            <p:cNvSpPr/>
-            <p:nvPr/>
-          </p:nvSpPr>
-          <p:spPr>
-            <a:xfrm>
-              <a:off x="2517702" y="2061014"/>
-              <a:ext cx="8132621" cy="2766244"/>
-            </a:xfrm>
-            <a:prstGeom prst="roundRect">
-              <a:avLst>
-                <a:gd name="adj" fmla="val 4132"/>
-              </a:avLst>
-            </a:prstGeom>
-            <a:grpFill/>
-            <a:ln w="12700">
-              <a:solidFill>
-                <a:schemeClr val="accent5">
-                  <a:lumMod val="50000"/>
-                </a:schemeClr>
-              </a:solidFill>
-              <a:prstDash val="solid"/>
-            </a:ln>
-          </p:spPr>
-          <p:txBody>
-            <a:bodyPr/>
-            <a:lstStyle/>
-            <a:p>
-              <a:pPr algn="ctr"/>
-              <a:endParaRPr lang="ru-RU" sz="2400" dirty="0"/>
-            </a:p>
-          </p:txBody>
-        </p:sp>
-        <p:sp>
-          <p:nvSpPr>
-            <p:cNvPr id="15" name="TextBox 14">
-              <a:extLst>
-                <a:ext uri="{FF2B5EF4-FFF2-40B4-BE49-F238E27FC236}">
-                  <a16:creationId xmlns:a16="http://schemas.microsoft.com/office/drawing/2014/main" id="{B030A7BE-D04F-686F-83FA-6DBF7BFA25A2}"/>
-                </a:ext>
-              </a:extLst>
-            </p:cNvPr>
-            <p:cNvSpPr txBox="1"/>
-            <p:nvPr/>
-          </p:nvSpPr>
-          <p:spPr>
-            <a:xfrm>
-              <a:off x="2558171" y="2316107"/>
-              <a:ext cx="7841783" cy="2477702"/>
-            </a:xfrm>
-            <a:prstGeom prst="rect">
-              <a:avLst/>
-            </a:prstGeom>
-            <a:grpFill/>
-            <a:ln>
-              <a:noFill/>
-            </a:ln>
-          </p:spPr>
-          <p:txBody>
-            <a:bodyPr wrap="square" rtlCol="0">
-              <a:spAutoFit/>
-            </a:bodyPr>
-            <a:lstStyle/>
-            <a:p>
-              <a:pPr algn="ctr"/>
-              <a:r>
-                <a:rPr lang="ru-RU" sz="2800" dirty="0"/>
-                <a:t>Автоматизация проверки тестирования</a:t>
-              </a:r>
-              <a:endParaRPr lang="ru-RU" sz="2800" dirty="0">
-                <a:cs typeface="Segoe UI" panose="020B0502040204020203" pitchFamily="34" charset="0"/>
-              </a:endParaRPr>
-            </a:p>
-          </p:txBody>
-        </p:sp>
-      </p:grpSp>
-      <p:grpSp>
-        <p:nvGrpSpPr>
-          <p:cNvPr id="16" name="Группа 15">
-            <a:extLst>
-              <a:ext uri="{FF2B5EF4-FFF2-40B4-BE49-F238E27FC236}">
-                <a16:creationId xmlns:a16="http://schemas.microsoft.com/office/drawing/2014/main" id="{2A1355C0-E0AC-11EC-478A-07485CCD6AB5}"/>
-              </a:ext>
-            </a:extLst>
-          </p:cNvPr>
-          <p:cNvGrpSpPr/>
-          <p:nvPr/>
-        </p:nvGrpSpPr>
-        <p:grpSpPr>
-          <a:xfrm>
-            <a:off x="2839311" y="2033181"/>
-            <a:ext cx="3254949" cy="1546285"/>
-            <a:chOff x="2412753" y="2109123"/>
-            <a:chExt cx="8132621" cy="2766244"/>
-          </a:xfrm>
-          <a:solidFill>
-            <a:srgbClr val="C00000"/>
-          </a:solidFill>
-        </p:grpSpPr>
-        <p:sp>
-          <p:nvSpPr>
-            <p:cNvPr id="17" name="Shape 27">
-              <a:extLst>
-                <a:ext uri="{FF2B5EF4-FFF2-40B4-BE49-F238E27FC236}">
-                  <a16:creationId xmlns:a16="http://schemas.microsoft.com/office/drawing/2014/main" id="{2198B90E-D6C3-AA07-A4D1-55184B37A8E0}"/>
-                </a:ext>
-              </a:extLst>
-            </p:cNvPr>
-            <p:cNvSpPr/>
-            <p:nvPr/>
-          </p:nvSpPr>
-          <p:spPr>
-            <a:xfrm>
-              <a:off x="2412753" y="2109123"/>
-              <a:ext cx="8132621" cy="2766244"/>
-            </a:xfrm>
-            <a:prstGeom prst="roundRect">
-              <a:avLst>
-                <a:gd name="adj" fmla="val 4132"/>
-              </a:avLst>
-            </a:prstGeom>
-            <a:solidFill>
-              <a:schemeClr val="accent2"/>
-            </a:solidFill>
-            <a:ln w="12700">
-              <a:solidFill>
-                <a:schemeClr val="accent2">
-                  <a:lumMod val="50000"/>
-                </a:schemeClr>
-              </a:solidFill>
-              <a:prstDash val="solid"/>
-            </a:ln>
-          </p:spPr>
-          <p:txBody>
-            <a:bodyPr/>
-            <a:lstStyle/>
-            <a:p>
-              <a:pPr algn="ctr"/>
-              <a:endParaRPr lang="ru-RU" sz="2400" dirty="0"/>
-            </a:p>
-          </p:txBody>
-        </p:sp>
-        <p:sp>
-          <p:nvSpPr>
-            <p:cNvPr id="18" name="TextBox 17">
-              <a:extLst>
-                <a:ext uri="{FF2B5EF4-FFF2-40B4-BE49-F238E27FC236}">
-                  <a16:creationId xmlns:a16="http://schemas.microsoft.com/office/drawing/2014/main" id="{B1174A51-36EC-D02E-D2A8-A9898EB4D590}"/>
-                </a:ext>
-              </a:extLst>
-            </p:cNvPr>
-            <p:cNvSpPr txBox="1"/>
-            <p:nvPr/>
-          </p:nvSpPr>
-          <p:spPr>
-            <a:xfrm>
-              <a:off x="2680457" y="2368860"/>
-              <a:ext cx="7624036" cy="2477702"/>
-            </a:xfrm>
-            <a:prstGeom prst="rect">
-              <a:avLst/>
-            </a:prstGeom>
-            <a:solidFill>
-              <a:schemeClr val="accent2"/>
-            </a:solidFill>
-            <a:ln>
-              <a:noFill/>
-            </a:ln>
-          </p:spPr>
-          <p:txBody>
-            <a:bodyPr wrap="square" rtlCol="0">
-              <a:spAutoFit/>
-            </a:bodyPr>
-            <a:lstStyle/>
-            <a:p>
-              <a:pPr algn="ctr"/>
-              <a:r>
-                <a:rPr lang="ru-RU" sz="2800" dirty="0"/>
-                <a:t>Различные типы интерактивных заданий</a:t>
-              </a:r>
-            </a:p>
-          </p:txBody>
-        </p:sp>
-      </p:grpSp>
-      <p:grpSp>
-        <p:nvGrpSpPr>
-          <p:cNvPr id="19" name="Группа 18">
-            <a:extLst>
-              <a:ext uri="{FF2B5EF4-FFF2-40B4-BE49-F238E27FC236}">
-                <a16:creationId xmlns:a16="http://schemas.microsoft.com/office/drawing/2014/main" id="{BCED09E5-FCF2-64A9-56D8-440A52AA40E4}"/>
-              </a:ext>
-            </a:extLst>
-          </p:cNvPr>
-          <p:cNvGrpSpPr/>
-          <p:nvPr/>
-        </p:nvGrpSpPr>
-        <p:grpSpPr>
-          <a:xfrm>
-            <a:off x="6299288" y="3540030"/>
-            <a:ext cx="3254949" cy="1546285"/>
-            <a:chOff x="2412753" y="2109124"/>
-            <a:chExt cx="8132621" cy="2766244"/>
-          </a:xfrm>
-          <a:solidFill>
-            <a:schemeClr val="accent4">
-              <a:lumMod val="60000"/>
-              <a:lumOff val="40000"/>
-            </a:schemeClr>
-          </a:solidFill>
-        </p:grpSpPr>
-        <p:sp>
-          <p:nvSpPr>
-            <p:cNvPr id="20" name="Shape 27">
-              <a:extLst>
-                <a:ext uri="{FF2B5EF4-FFF2-40B4-BE49-F238E27FC236}">
-                  <a16:creationId xmlns:a16="http://schemas.microsoft.com/office/drawing/2014/main" id="{D3659539-85A4-30E6-419B-86F27988D253}"/>
-                </a:ext>
-              </a:extLst>
-            </p:cNvPr>
-            <p:cNvSpPr/>
-            <p:nvPr/>
-          </p:nvSpPr>
-          <p:spPr>
-            <a:xfrm>
-              <a:off x="2412753" y="2109124"/>
-              <a:ext cx="8132621" cy="2766244"/>
-            </a:xfrm>
-            <a:prstGeom prst="roundRect">
-              <a:avLst>
-                <a:gd name="adj" fmla="val 4132"/>
-              </a:avLst>
-            </a:prstGeom>
-            <a:grpFill/>
-            <a:ln w="12700">
-              <a:solidFill>
-                <a:schemeClr val="accent4">
-                  <a:lumMod val="75000"/>
-                </a:schemeClr>
-              </a:solidFill>
-              <a:prstDash val="solid"/>
-            </a:ln>
-          </p:spPr>
-          <p:txBody>
-            <a:bodyPr/>
-            <a:lstStyle/>
-            <a:p>
-              <a:pPr algn="ctr"/>
-              <a:endParaRPr lang="ru-RU" sz="2400" dirty="0"/>
-            </a:p>
-          </p:txBody>
-        </p:sp>
-        <p:sp>
-          <p:nvSpPr>
-            <p:cNvPr id="21" name="TextBox 20">
-              <a:extLst>
-                <a:ext uri="{FF2B5EF4-FFF2-40B4-BE49-F238E27FC236}">
-                  <a16:creationId xmlns:a16="http://schemas.microsoft.com/office/drawing/2014/main" id="{66D49495-9638-D7FC-2774-01ABBF106D8C}"/>
-                </a:ext>
-              </a:extLst>
-            </p:cNvPr>
-            <p:cNvSpPr txBox="1"/>
-            <p:nvPr/>
-          </p:nvSpPr>
-          <p:spPr>
-            <a:xfrm>
-              <a:off x="2657323" y="2253389"/>
-              <a:ext cx="7437627" cy="2477702"/>
-            </a:xfrm>
-            <a:prstGeom prst="rect">
-              <a:avLst/>
-            </a:prstGeom>
-            <a:grpFill/>
-          </p:spPr>
-          <p:txBody>
-            <a:bodyPr wrap="square" rtlCol="0">
-              <a:spAutoFit/>
-            </a:bodyPr>
-            <a:lstStyle/>
-            <a:p>
-              <a:pPr algn="ctr"/>
-              <a:r>
-                <a:rPr lang="ru-RU" sz="2800" dirty="0">
-                  <a:cs typeface="Segoe UI" panose="020B0502040204020203" pitchFamily="34" charset="0"/>
-                </a:rPr>
-                <a:t>Систематизация учебных материалов</a:t>
-              </a:r>
-              <a:endParaRPr lang="ru-RU" sz="2800" dirty="0"/>
-            </a:p>
-          </p:txBody>
-        </p:sp>
-      </p:grpSp>
-      <p:sp>
-        <p:nvSpPr>
-          <p:cNvPr id="48" name="Овал 47">
-            <a:extLst>
-              <a:ext uri="{FF2B5EF4-FFF2-40B4-BE49-F238E27FC236}">
-                <a16:creationId xmlns:a16="http://schemas.microsoft.com/office/drawing/2014/main" id="{18649E56-F528-B184-03BC-9F2A0C9D929B}"/>
+                <a16:creationId xmlns:a16="http://schemas.microsoft.com/office/drawing/2014/main" id="{57ABC5E9-BD36-3CC3-958A-B0E3212A5C03}"/>
               </a:ext>
             </a:extLst>
           </p:cNvPr>
@@ -5176,21 +4847,20 @@
         </p:nvSpPr>
         <p:spPr>
           <a:xfrm>
-            <a:off x="11051199" y="1122016"/>
+            <a:off x="-1747287" y="2533336"/>
             <a:ext cx="2457450" cy="2457450"/>
           </a:xfrm>
           <a:prstGeom prst="ellipse">
             <a:avLst/>
           </a:prstGeom>
           <a:solidFill>
-            <a:schemeClr val="accent1">
-              <a:lumMod val="60000"/>
-              <a:lumOff val="40000"/>
-            </a:schemeClr>
+            <a:srgbClr val="FFC4A3"/>
           </a:solidFill>
           <a:ln>
             <a:solidFill>
-              <a:schemeClr val="bg1"/>
+              <a:schemeClr val="accent2">
+                <a:lumMod val="75000"/>
+              </a:schemeClr>
             </a:solidFill>
           </a:ln>
         </p:spPr>
@@ -5219,10 +4889,10 @@
       </p:sp>
       <p:sp>
         <p:nvSpPr>
-          <p:cNvPr id="49" name="Овал 48">
+          <p:cNvPr id="33" name="Овал 32">
             <a:extLst>
               <a:ext uri="{FF2B5EF4-FFF2-40B4-BE49-F238E27FC236}">
-                <a16:creationId xmlns:a16="http://schemas.microsoft.com/office/drawing/2014/main" id="{47470B9A-A1B9-3A5C-9C74-585DDB95B0F6}"/>
+                <a16:creationId xmlns:a16="http://schemas.microsoft.com/office/drawing/2014/main" id="{05CCC749-AF23-8BD3-2173-E53357DAF78D}"/>
               </a:ext>
             </a:extLst>
           </p:cNvPr>
@@ -5231,21 +4901,20 @@
         </p:nvSpPr>
         <p:spPr>
           <a:xfrm>
-            <a:off x="-1207810" y="2944536"/>
+            <a:off x="5955905" y="5983398"/>
             <a:ext cx="2457450" cy="2457450"/>
           </a:xfrm>
           <a:prstGeom prst="ellipse">
             <a:avLst/>
           </a:prstGeom>
           <a:solidFill>
-            <a:schemeClr val="accent1">
-              <a:lumMod val="60000"/>
-              <a:lumOff val="40000"/>
-            </a:schemeClr>
+            <a:srgbClr val="FFC4A3"/>
           </a:solidFill>
           <a:ln>
             <a:solidFill>
-              <a:schemeClr val="bg1"/>
+              <a:schemeClr val="accent2">
+                <a:lumMod val="75000"/>
+              </a:schemeClr>
             </a:solidFill>
           </a:ln>
         </p:spPr>
@@ -5274,10 +4943,10 @@
       </p:sp>
       <p:sp>
         <p:nvSpPr>
-          <p:cNvPr id="50" name="Овал 49">
+          <p:cNvPr id="34" name="Овал 33">
             <a:extLst>
               <a:ext uri="{FF2B5EF4-FFF2-40B4-BE49-F238E27FC236}">
-                <a16:creationId xmlns:a16="http://schemas.microsoft.com/office/drawing/2014/main" id="{9F9F03B7-0FE5-EE72-D08D-A5F0C825E449}"/>
+                <a16:creationId xmlns:a16="http://schemas.microsoft.com/office/drawing/2014/main" id="{1CF6EA86-F62C-53D7-8225-4737FF24BE3A}"/>
               </a:ext>
             </a:extLst>
           </p:cNvPr>
@@ -5286,21 +4955,20 @@
         </p:nvSpPr>
         <p:spPr>
           <a:xfrm>
-            <a:off x="5831517" y="5824559"/>
+            <a:off x="11329987" y="1948629"/>
             <a:ext cx="2457450" cy="2457450"/>
           </a:xfrm>
           <a:prstGeom prst="ellipse">
             <a:avLst/>
           </a:prstGeom>
           <a:solidFill>
-            <a:schemeClr val="accent1">
-              <a:lumMod val="60000"/>
-              <a:lumOff val="40000"/>
-            </a:schemeClr>
+            <a:srgbClr val="FFC4A3"/>
           </a:solidFill>
           <a:ln>
             <a:solidFill>
-              <a:schemeClr val="bg1"/>
+              <a:schemeClr val="accent2">
+                <a:lumMod val="75000"/>
+              </a:schemeClr>
             </a:solidFill>
           </a:ln>
         </p:spPr>
@@ -5327,6 +4995,654 @@
           </a:p>
         </p:txBody>
       </p:sp>
+      <p:grpSp>
+        <p:nvGrpSpPr>
+          <p:cNvPr id="40" name="Группа 39">
+            <a:extLst>
+              <a:ext uri="{FF2B5EF4-FFF2-40B4-BE49-F238E27FC236}">
+                <a16:creationId xmlns:a16="http://schemas.microsoft.com/office/drawing/2014/main" id="{C1065D2D-CBEE-D694-B248-632D4449AD26}"/>
+              </a:ext>
+            </a:extLst>
+          </p:cNvPr>
+          <p:cNvGrpSpPr/>
+          <p:nvPr/>
+        </p:nvGrpSpPr>
+        <p:grpSpPr>
+          <a:xfrm>
+            <a:off x="1589726" y="1624372"/>
+            <a:ext cx="3274693" cy="1661596"/>
+            <a:chOff x="1589726" y="1624372"/>
+            <a:chExt cx="3274693" cy="1661596"/>
+          </a:xfrm>
+        </p:grpSpPr>
+        <p:grpSp>
+          <p:nvGrpSpPr>
+            <p:cNvPr id="7" name="Группа 6">
+              <a:extLst>
+                <a:ext uri="{FF2B5EF4-FFF2-40B4-BE49-F238E27FC236}">
+                  <a16:creationId xmlns:a16="http://schemas.microsoft.com/office/drawing/2014/main" id="{48E7135E-F0C6-CFF1-197B-065FD316AD09}"/>
+                </a:ext>
+              </a:extLst>
+            </p:cNvPr>
+            <p:cNvGrpSpPr/>
+            <p:nvPr/>
+          </p:nvGrpSpPr>
+          <p:grpSpPr>
+            <a:xfrm>
+              <a:off x="1589726" y="1624372"/>
+              <a:ext cx="3274693" cy="1661596"/>
+              <a:chOff x="2412753" y="2109123"/>
+              <a:chExt cx="8132621" cy="2766244"/>
+            </a:xfrm>
+            <a:solidFill>
+              <a:schemeClr val="accent5">
+                <a:lumMod val="40000"/>
+                <a:lumOff val="60000"/>
+              </a:schemeClr>
+            </a:solidFill>
+          </p:grpSpPr>
+          <p:sp>
+            <p:nvSpPr>
+              <p:cNvPr id="8" name="Shape 27">
+                <a:extLst>
+                  <a:ext uri="{FF2B5EF4-FFF2-40B4-BE49-F238E27FC236}">
+                    <a16:creationId xmlns:a16="http://schemas.microsoft.com/office/drawing/2014/main" id="{2F137871-9483-26AD-BAA7-7A08B7058D20}"/>
+                  </a:ext>
+                </a:extLst>
+              </p:cNvPr>
+              <p:cNvSpPr/>
+              <p:nvPr/>
+            </p:nvSpPr>
+            <p:spPr>
+              <a:xfrm>
+                <a:off x="2412753" y="2109123"/>
+                <a:ext cx="8132621" cy="2766244"/>
+              </a:xfrm>
+              <a:prstGeom prst="roundRect">
+                <a:avLst>
+                  <a:gd name="adj" fmla="val 4132"/>
+                </a:avLst>
+              </a:prstGeom>
+              <a:grpFill/>
+              <a:ln w="12700">
+                <a:solidFill>
+                  <a:schemeClr val="accent1"/>
+                </a:solidFill>
+                <a:prstDash val="solid"/>
+              </a:ln>
+            </p:spPr>
+            <p:txBody>
+              <a:bodyPr/>
+              <a:lstStyle/>
+              <a:p>
+                <a:pPr algn="ctr"/>
+                <a:endParaRPr lang="ru-RU" sz="2400" dirty="0"/>
+              </a:p>
+            </p:txBody>
+          </p:sp>
+          <p:sp>
+            <p:nvSpPr>
+              <p:cNvPr id="9" name="TextBox 8">
+                <a:extLst>
+                  <a:ext uri="{FF2B5EF4-FFF2-40B4-BE49-F238E27FC236}">
+                    <a16:creationId xmlns:a16="http://schemas.microsoft.com/office/drawing/2014/main" id="{B933002A-5871-4848-3DAC-920BE64F9783}"/>
+                  </a:ext>
+                </a:extLst>
+              </p:cNvPr>
+              <p:cNvSpPr txBox="1"/>
+              <p:nvPr/>
+            </p:nvSpPr>
+            <p:spPr>
+              <a:xfrm>
+                <a:off x="2680457" y="2238993"/>
+                <a:ext cx="7091391" cy="693024"/>
+              </a:xfrm>
+              <a:prstGeom prst="rect">
+                <a:avLst/>
+              </a:prstGeom>
+              <a:grpFill/>
+              <a:ln>
+                <a:noFill/>
+              </a:ln>
+            </p:spPr>
+            <p:txBody>
+              <a:bodyPr wrap="square" rtlCol="0">
+                <a:spAutoFit/>
+              </a:bodyPr>
+              <a:lstStyle/>
+              <a:p>
+                <a:r>
+                  <a:rPr lang="ru-RU" sz="2400" b="1" dirty="0"/>
+                  <a:t>Интерактивность</a:t>
+                </a:r>
+              </a:p>
+            </p:txBody>
+          </p:sp>
+        </p:grpSp>
+        <p:sp>
+          <p:nvSpPr>
+            <p:cNvPr id="35" name="TextBox 34">
+              <a:extLst>
+                <a:ext uri="{FF2B5EF4-FFF2-40B4-BE49-F238E27FC236}">
+                  <a16:creationId xmlns:a16="http://schemas.microsoft.com/office/drawing/2014/main" id="{68056B51-E040-38C2-A267-DC3F784B0D8C}"/>
+                </a:ext>
+              </a:extLst>
+            </p:cNvPr>
+            <p:cNvSpPr txBox="1"/>
+            <p:nvPr/>
+          </p:nvSpPr>
+          <p:spPr>
+            <a:xfrm>
+              <a:off x="1722193" y="2244301"/>
+              <a:ext cx="3033562" cy="646331"/>
+            </a:xfrm>
+            <a:prstGeom prst="rect">
+              <a:avLst/>
+            </a:prstGeom>
+            <a:noFill/>
+          </p:spPr>
+          <p:txBody>
+            <a:bodyPr wrap="square" rtlCol="0">
+              <a:spAutoFit/>
+            </a:bodyPr>
+            <a:lstStyle/>
+            <a:p>
+              <a:r>
+                <a:rPr lang="ru-RU" dirty="0"/>
+                <a:t>Разные типы заданий для закрепления правил</a:t>
+              </a:r>
+            </a:p>
+          </p:txBody>
+        </p:sp>
+      </p:grpSp>
+      <p:grpSp>
+        <p:nvGrpSpPr>
+          <p:cNvPr id="42" name="Группа 41">
+            <a:extLst>
+              <a:ext uri="{FF2B5EF4-FFF2-40B4-BE49-F238E27FC236}">
+                <a16:creationId xmlns:a16="http://schemas.microsoft.com/office/drawing/2014/main" id="{6E940ACF-1788-0AB1-ED01-45A3989E5C5D}"/>
+              </a:ext>
+            </a:extLst>
+          </p:cNvPr>
+          <p:cNvGrpSpPr/>
+          <p:nvPr/>
+        </p:nvGrpSpPr>
+        <p:grpSpPr>
+          <a:xfrm>
+            <a:off x="7327580" y="1597934"/>
+            <a:ext cx="3274694" cy="1661594"/>
+            <a:chOff x="6459856" y="1624372"/>
+            <a:chExt cx="3274694" cy="1661594"/>
+          </a:xfrm>
+        </p:grpSpPr>
+        <p:grpSp>
+          <p:nvGrpSpPr>
+            <p:cNvPr id="25" name="Группа 24">
+              <a:extLst>
+                <a:ext uri="{FF2B5EF4-FFF2-40B4-BE49-F238E27FC236}">
+                  <a16:creationId xmlns:a16="http://schemas.microsoft.com/office/drawing/2014/main" id="{8158F045-A628-5CA3-DA98-C5B91C26F3FD}"/>
+                </a:ext>
+              </a:extLst>
+            </p:cNvPr>
+            <p:cNvGrpSpPr/>
+            <p:nvPr/>
+          </p:nvGrpSpPr>
+          <p:grpSpPr>
+            <a:xfrm>
+              <a:off x="6459856" y="1624372"/>
+              <a:ext cx="3274694" cy="1661594"/>
+              <a:chOff x="2412753" y="2109123"/>
+              <a:chExt cx="8132621" cy="2766244"/>
+            </a:xfrm>
+            <a:solidFill>
+              <a:schemeClr val="accent5">
+                <a:lumMod val="40000"/>
+                <a:lumOff val="60000"/>
+              </a:schemeClr>
+            </a:solidFill>
+          </p:grpSpPr>
+          <p:sp>
+            <p:nvSpPr>
+              <p:cNvPr id="26" name="Shape 27">
+                <a:extLst>
+                  <a:ext uri="{FF2B5EF4-FFF2-40B4-BE49-F238E27FC236}">
+                    <a16:creationId xmlns:a16="http://schemas.microsoft.com/office/drawing/2014/main" id="{DF5F0DA4-A7BA-CD0F-0EDA-8591A082DA93}"/>
+                  </a:ext>
+                </a:extLst>
+              </p:cNvPr>
+              <p:cNvSpPr/>
+              <p:nvPr/>
+            </p:nvSpPr>
+            <p:spPr>
+              <a:xfrm>
+                <a:off x="2412753" y="2109123"/>
+                <a:ext cx="8132621" cy="2766244"/>
+              </a:xfrm>
+              <a:prstGeom prst="roundRect">
+                <a:avLst>
+                  <a:gd name="adj" fmla="val 4132"/>
+                </a:avLst>
+              </a:prstGeom>
+              <a:grpFill/>
+              <a:ln w="12700">
+                <a:solidFill>
+                  <a:schemeClr val="accent1"/>
+                </a:solidFill>
+                <a:prstDash val="solid"/>
+              </a:ln>
+            </p:spPr>
+            <p:txBody>
+              <a:bodyPr/>
+              <a:lstStyle/>
+              <a:p>
+                <a:pPr algn="ctr"/>
+                <a:endParaRPr lang="ru-RU" sz="2400" dirty="0"/>
+              </a:p>
+            </p:txBody>
+          </p:sp>
+          <p:sp>
+            <p:nvSpPr>
+              <p:cNvPr id="27" name="TextBox 26">
+                <a:extLst>
+                  <a:ext uri="{FF2B5EF4-FFF2-40B4-BE49-F238E27FC236}">
+                    <a16:creationId xmlns:a16="http://schemas.microsoft.com/office/drawing/2014/main" id="{FF69526B-016D-1CD4-729E-5809A62E9DC4}"/>
+                  </a:ext>
+                </a:extLst>
+              </p:cNvPr>
+              <p:cNvSpPr txBox="1"/>
+              <p:nvPr/>
+            </p:nvSpPr>
+            <p:spPr>
+              <a:xfrm>
+                <a:off x="2680458" y="2238993"/>
+                <a:ext cx="6212092" cy="736429"/>
+              </a:xfrm>
+              <a:prstGeom prst="rect">
+                <a:avLst/>
+              </a:prstGeom>
+              <a:grpFill/>
+              <a:ln>
+                <a:noFill/>
+              </a:ln>
+            </p:spPr>
+            <p:txBody>
+              <a:bodyPr wrap="square" rtlCol="0">
+                <a:spAutoFit/>
+              </a:bodyPr>
+              <a:lstStyle/>
+              <a:p>
+                <a:r>
+                  <a:rPr lang="ru-RU" sz="2400" b="1" dirty="0"/>
+                  <a:t>Автоматизация</a:t>
+                </a:r>
+              </a:p>
+            </p:txBody>
+          </p:sp>
+        </p:grpSp>
+        <p:sp>
+          <p:nvSpPr>
+            <p:cNvPr id="36" name="TextBox 35">
+              <a:extLst>
+                <a:ext uri="{FF2B5EF4-FFF2-40B4-BE49-F238E27FC236}">
+                  <a16:creationId xmlns:a16="http://schemas.microsoft.com/office/drawing/2014/main" id="{C0DB32BD-6D1C-FE10-1321-821B09C5388E}"/>
+                </a:ext>
+              </a:extLst>
+            </p:cNvPr>
+            <p:cNvSpPr txBox="1"/>
+            <p:nvPr/>
+          </p:nvSpPr>
+          <p:spPr>
+            <a:xfrm>
+              <a:off x="6589543" y="2270740"/>
+              <a:ext cx="3049757" cy="646331"/>
+            </a:xfrm>
+            <a:prstGeom prst="rect">
+              <a:avLst/>
+            </a:prstGeom>
+            <a:noFill/>
+          </p:spPr>
+          <p:txBody>
+            <a:bodyPr wrap="square" rtlCol="0">
+              <a:spAutoFit/>
+            </a:bodyPr>
+            <a:lstStyle/>
+            <a:p>
+              <a:r>
+                <a:rPr lang="ru-RU" dirty="0"/>
+                <a:t>Проверка тестов и сохранение результатов</a:t>
+              </a:r>
+            </a:p>
+          </p:txBody>
+        </p:sp>
+      </p:grpSp>
+      <p:grpSp>
+        <p:nvGrpSpPr>
+          <p:cNvPr id="39" name="Группа 38">
+            <a:extLst>
+              <a:ext uri="{FF2B5EF4-FFF2-40B4-BE49-F238E27FC236}">
+                <a16:creationId xmlns:a16="http://schemas.microsoft.com/office/drawing/2014/main" id="{277EE988-E859-61FD-88A7-688BC5749561}"/>
+              </a:ext>
+            </a:extLst>
+          </p:cNvPr>
+          <p:cNvGrpSpPr/>
+          <p:nvPr/>
+        </p:nvGrpSpPr>
+        <p:grpSpPr>
+          <a:xfrm>
+            <a:off x="1589726" y="3665593"/>
+            <a:ext cx="3515674" cy="1671881"/>
+            <a:chOff x="1589726" y="3680646"/>
+            <a:chExt cx="3515674" cy="1671881"/>
+          </a:xfrm>
+        </p:grpSpPr>
+        <p:grpSp>
+          <p:nvGrpSpPr>
+            <p:cNvPr id="22" name="Группа 21">
+              <a:extLst>
+                <a:ext uri="{FF2B5EF4-FFF2-40B4-BE49-F238E27FC236}">
+                  <a16:creationId xmlns:a16="http://schemas.microsoft.com/office/drawing/2014/main" id="{66954C43-7642-AFA6-7F9D-C5100EA788A3}"/>
+                </a:ext>
+              </a:extLst>
+            </p:cNvPr>
+            <p:cNvGrpSpPr/>
+            <p:nvPr/>
+          </p:nvGrpSpPr>
+          <p:grpSpPr>
+            <a:xfrm>
+              <a:off x="1589726" y="3680646"/>
+              <a:ext cx="3274693" cy="1671881"/>
+              <a:chOff x="2412753" y="2109123"/>
+              <a:chExt cx="8132621" cy="2766244"/>
+            </a:xfrm>
+            <a:solidFill>
+              <a:schemeClr val="accent5">
+                <a:lumMod val="40000"/>
+                <a:lumOff val="60000"/>
+              </a:schemeClr>
+            </a:solidFill>
+          </p:grpSpPr>
+          <p:sp>
+            <p:nvSpPr>
+              <p:cNvPr id="23" name="Shape 27">
+                <a:extLst>
+                  <a:ext uri="{FF2B5EF4-FFF2-40B4-BE49-F238E27FC236}">
+                    <a16:creationId xmlns:a16="http://schemas.microsoft.com/office/drawing/2014/main" id="{B3B4CC09-8D28-0E8D-83A7-9CC2EB5AD02D}"/>
+                  </a:ext>
+                </a:extLst>
+              </p:cNvPr>
+              <p:cNvSpPr/>
+              <p:nvPr/>
+            </p:nvSpPr>
+            <p:spPr>
+              <a:xfrm>
+                <a:off x="2412753" y="2109123"/>
+                <a:ext cx="8132621" cy="2766244"/>
+              </a:xfrm>
+              <a:prstGeom prst="roundRect">
+                <a:avLst>
+                  <a:gd name="adj" fmla="val 4132"/>
+                </a:avLst>
+              </a:prstGeom>
+              <a:grpFill/>
+              <a:ln w="12700">
+                <a:solidFill>
+                  <a:schemeClr val="accent1"/>
+                </a:solidFill>
+                <a:prstDash val="solid"/>
+              </a:ln>
+            </p:spPr>
+            <p:txBody>
+              <a:bodyPr/>
+              <a:lstStyle/>
+              <a:p>
+                <a:pPr algn="ctr"/>
+                <a:endParaRPr lang="ru-RU" sz="2400" dirty="0"/>
+              </a:p>
+            </p:txBody>
+          </p:sp>
+          <p:sp>
+            <p:nvSpPr>
+              <p:cNvPr id="24" name="TextBox 23">
+                <a:extLst>
+                  <a:ext uri="{FF2B5EF4-FFF2-40B4-BE49-F238E27FC236}">
+                    <a16:creationId xmlns:a16="http://schemas.microsoft.com/office/drawing/2014/main" id="{4E97DCA9-15BF-0BDD-FDA2-F547F529BE4B}"/>
+                  </a:ext>
+                </a:extLst>
+              </p:cNvPr>
+              <p:cNvSpPr txBox="1"/>
+              <p:nvPr/>
+            </p:nvSpPr>
+            <p:spPr>
+              <a:xfrm>
+                <a:off x="2680457" y="2238994"/>
+                <a:ext cx="7564494" cy="1374943"/>
+              </a:xfrm>
+              <a:prstGeom prst="rect">
+                <a:avLst/>
+              </a:prstGeom>
+              <a:grpFill/>
+              <a:ln>
+                <a:noFill/>
+              </a:ln>
+            </p:spPr>
+            <p:txBody>
+              <a:bodyPr wrap="square" rtlCol="0">
+                <a:spAutoFit/>
+              </a:bodyPr>
+              <a:lstStyle/>
+              <a:p>
+                <a:r>
+                  <a:rPr lang="ru-RU" sz="2400" b="1" dirty="0"/>
+                  <a:t>Личная статистика</a:t>
+                </a:r>
+                <a:br>
+                  <a:rPr lang="ru-RU" sz="2400" dirty="0"/>
+                </a:br>
+                <a:endParaRPr lang="ru-RU" sz="2400" dirty="0"/>
+              </a:p>
+            </p:txBody>
+          </p:sp>
+        </p:grpSp>
+        <p:sp>
+          <p:nvSpPr>
+            <p:cNvPr id="37" name="TextBox 36">
+              <a:extLst>
+                <a:ext uri="{FF2B5EF4-FFF2-40B4-BE49-F238E27FC236}">
+                  <a16:creationId xmlns:a16="http://schemas.microsoft.com/office/drawing/2014/main" id="{DAC824FB-B4A3-8C64-2D61-6FA548E5D851}"/>
+                </a:ext>
+              </a:extLst>
+            </p:cNvPr>
+            <p:cNvSpPr txBox="1"/>
+            <p:nvPr/>
+          </p:nvSpPr>
+          <p:spPr>
+            <a:xfrm>
+              <a:off x="1589726" y="4421132"/>
+              <a:ext cx="3515674" cy="646331"/>
+            </a:xfrm>
+            <a:prstGeom prst="rect">
+              <a:avLst/>
+            </a:prstGeom>
+            <a:noFill/>
+          </p:spPr>
+          <p:txBody>
+            <a:bodyPr wrap="square" rtlCol="0">
+              <a:spAutoFit/>
+            </a:bodyPr>
+            <a:lstStyle/>
+            <a:p>
+              <a:r>
+                <a:rPr lang="ru-RU" dirty="0"/>
+                <a:t>Отображение прогресса и рекомендаций для студента</a:t>
+              </a:r>
+            </a:p>
+          </p:txBody>
+        </p:sp>
+      </p:grpSp>
+      <p:grpSp>
+        <p:nvGrpSpPr>
+          <p:cNvPr id="41" name="Группа 40">
+            <a:extLst>
+              <a:ext uri="{FF2B5EF4-FFF2-40B4-BE49-F238E27FC236}">
+                <a16:creationId xmlns:a16="http://schemas.microsoft.com/office/drawing/2014/main" id="{0EB46791-E4C2-E018-0698-6846D8DBB7A2}"/>
+              </a:ext>
+            </a:extLst>
+          </p:cNvPr>
+          <p:cNvGrpSpPr/>
+          <p:nvPr/>
+        </p:nvGrpSpPr>
+        <p:grpSpPr>
+          <a:xfrm>
+            <a:off x="7327580" y="3682863"/>
+            <a:ext cx="3274694" cy="1671880"/>
+            <a:chOff x="6459856" y="3665593"/>
+            <a:chExt cx="3274694" cy="1671880"/>
+          </a:xfrm>
+        </p:grpSpPr>
+        <p:grpSp>
+          <p:nvGrpSpPr>
+            <p:cNvPr id="28" name="Группа 27">
+              <a:extLst>
+                <a:ext uri="{FF2B5EF4-FFF2-40B4-BE49-F238E27FC236}">
+                  <a16:creationId xmlns:a16="http://schemas.microsoft.com/office/drawing/2014/main" id="{833D8064-EEA7-49F7-92EA-547EA2674159}"/>
+                </a:ext>
+              </a:extLst>
+            </p:cNvPr>
+            <p:cNvGrpSpPr/>
+            <p:nvPr/>
+          </p:nvGrpSpPr>
+          <p:grpSpPr>
+            <a:xfrm>
+              <a:off x="6459856" y="3665593"/>
+              <a:ext cx="3274694" cy="1671880"/>
+              <a:chOff x="2412752" y="2109123"/>
+              <a:chExt cx="8132620" cy="2766244"/>
+            </a:xfrm>
+            <a:solidFill>
+              <a:schemeClr val="accent5">
+                <a:lumMod val="40000"/>
+                <a:lumOff val="60000"/>
+              </a:schemeClr>
+            </a:solidFill>
+          </p:grpSpPr>
+          <p:sp>
+            <p:nvSpPr>
+              <p:cNvPr id="30" name="Shape 27">
+                <a:extLst>
+                  <a:ext uri="{FF2B5EF4-FFF2-40B4-BE49-F238E27FC236}">
+                    <a16:creationId xmlns:a16="http://schemas.microsoft.com/office/drawing/2014/main" id="{2D0411C8-F64B-42AC-2C42-5BDE85315533}"/>
+                  </a:ext>
+                </a:extLst>
+              </p:cNvPr>
+              <p:cNvSpPr/>
+              <p:nvPr/>
+            </p:nvSpPr>
+            <p:spPr>
+              <a:xfrm>
+                <a:off x="2412752" y="2109123"/>
+                <a:ext cx="8132620" cy="2766244"/>
+              </a:xfrm>
+              <a:prstGeom prst="roundRect">
+                <a:avLst>
+                  <a:gd name="adj" fmla="val 4132"/>
+                </a:avLst>
+              </a:prstGeom>
+              <a:grpFill/>
+              <a:ln w="12700">
+                <a:solidFill>
+                  <a:schemeClr val="accent1"/>
+                </a:solidFill>
+                <a:prstDash val="solid"/>
+              </a:ln>
+            </p:spPr>
+            <p:txBody>
+              <a:bodyPr/>
+              <a:lstStyle/>
+              <a:p>
+                <a:pPr algn="ctr"/>
+                <a:endParaRPr lang="ru-RU" sz="2400" dirty="0"/>
+              </a:p>
+            </p:txBody>
+          </p:sp>
+          <p:sp>
+            <p:nvSpPr>
+              <p:cNvPr id="31" name="TextBox 30">
+                <a:extLst>
+                  <a:ext uri="{FF2B5EF4-FFF2-40B4-BE49-F238E27FC236}">
+                    <a16:creationId xmlns:a16="http://schemas.microsoft.com/office/drawing/2014/main" id="{314B99A0-EB1C-49ED-F940-718666EEF55E}"/>
+                  </a:ext>
+                </a:extLst>
+              </p:cNvPr>
+              <p:cNvSpPr txBox="1"/>
+              <p:nvPr/>
+            </p:nvSpPr>
+            <p:spPr>
+              <a:xfrm>
+                <a:off x="2680458" y="2238994"/>
+                <a:ext cx="6212092" cy="1325573"/>
+              </a:xfrm>
+              <a:prstGeom prst="rect">
+                <a:avLst/>
+              </a:prstGeom>
+              <a:grpFill/>
+              <a:ln>
+                <a:noFill/>
+              </a:ln>
+            </p:spPr>
+            <p:txBody>
+              <a:bodyPr wrap="square" rtlCol="0">
+                <a:spAutoFit/>
+              </a:bodyPr>
+              <a:lstStyle/>
+              <a:p>
+                <a:r>
+                  <a:rPr lang="ru-RU" sz="2400" b="1" dirty="0"/>
+                  <a:t>Единая среда</a:t>
+                </a:r>
+                <a:br>
+                  <a:rPr lang="ru-RU" sz="2400" dirty="0"/>
+                </a:br>
+                <a:endParaRPr lang="ru-RU" sz="2400" dirty="0"/>
+              </a:p>
+            </p:txBody>
+          </p:sp>
+        </p:grpSp>
+        <p:sp>
+          <p:nvSpPr>
+            <p:cNvPr id="38" name="TextBox 37">
+              <a:extLst>
+                <a:ext uri="{FF2B5EF4-FFF2-40B4-BE49-F238E27FC236}">
+                  <a16:creationId xmlns:a16="http://schemas.microsoft.com/office/drawing/2014/main" id="{254AB31D-701D-F39F-8B76-43F452623A45}"/>
+                </a:ext>
+              </a:extLst>
+            </p:cNvPr>
+            <p:cNvSpPr txBox="1"/>
+            <p:nvPr/>
+          </p:nvSpPr>
+          <p:spPr>
+            <a:xfrm>
+              <a:off x="6589543" y="4283633"/>
+              <a:ext cx="3049757" cy="923330"/>
+            </a:xfrm>
+            <a:prstGeom prst="rect">
+              <a:avLst/>
+            </a:prstGeom>
+            <a:noFill/>
+          </p:spPr>
+          <p:txBody>
+            <a:bodyPr wrap="square" rtlCol="0">
+              <a:spAutoFit/>
+            </a:bodyPr>
+            <a:lstStyle/>
+            <a:p>
+              <a:r>
+                <a:rPr lang="ru-RU" dirty="0"/>
+                <a:t>Учебные материалы и тестирование в одном приложении</a:t>
+              </a:r>
+            </a:p>
+          </p:txBody>
+        </p:sp>
+      </p:grpSp>
     </p:spTree>
     <p:extLst>
       <p:ext uri="{BB962C8B-B14F-4D97-AF65-F5344CB8AC3E}">
@@ -5522,8 +5838,8 @@
         </p:nvSpPr>
         <p:spPr>
           <a:xfrm>
-            <a:off x="10829925" y="6234682"/>
-            <a:ext cx="1162050" cy="544449"/>
+            <a:off x="10049608" y="6234682"/>
+            <a:ext cx="1942367" cy="544449"/>
           </a:xfrm>
           <a:prstGeom prst="rect">
             <a:avLst/>
@@ -6019,8 +6335,8 @@
         </p:nvSpPr>
         <p:spPr>
           <a:xfrm>
-            <a:off x="-1609725" y="3264191"/>
-            <a:ext cx="14592300" cy="830997"/>
+            <a:off x="1508789" y="3264191"/>
+            <a:ext cx="9356725" cy="830997"/>
           </a:xfrm>
           <a:prstGeom prst="rect">
             <a:avLst/>
@@ -6067,8 +6383,8 @@
         </p:nvSpPr>
         <p:spPr>
           <a:xfrm>
-            <a:off x="299100" y="4672584"/>
-            <a:ext cx="6215999" cy="584775"/>
+            <a:off x="299100" y="4571236"/>
+            <a:ext cx="6215999" cy="646331"/>
           </a:xfrm>
           <a:prstGeom prst="rect">
             <a:avLst/>
@@ -6082,7 +6398,7 @@
           <a:lstStyle/>
           <a:p>
             <a:r>
-              <a:rPr lang="ru-RU" sz="1600" b="1" dirty="0">
+              <a:rPr lang="ru-RU" b="1" dirty="0">
                 <a:ea typeface="Verdana" panose="020B0604030504040204" pitchFamily="34" charset="0"/>
               </a:rPr>
               <a:t>Дипломник </a:t>
@@ -6090,18 +6406,18 @@
           </a:p>
           <a:p>
             <a:r>
-              <a:rPr lang="ru-RU" sz="1600" dirty="0" err="1">
+              <a:rPr lang="ru-RU" dirty="0" err="1">
                 <a:ea typeface="Verdana" panose="020B0604030504040204" pitchFamily="34" charset="0"/>
               </a:rPr>
               <a:t>Вепрёв</a:t>
             </a:r>
             <a:r>
-              <a:rPr lang="ru-RU" sz="1600" dirty="0">
+              <a:rPr lang="ru-RU" dirty="0">
                 <a:ea typeface="Verdana" panose="020B0604030504040204" pitchFamily="34" charset="0"/>
               </a:rPr>
               <a:t> Александр Михайлович </a:t>
             </a:r>
-            <a:endParaRPr lang="ru-RU" sz="1600" dirty="0"/>
+            <a:endParaRPr lang="ru-RU" dirty="0"/>
           </a:p>
         </p:txBody>
       </p:sp>
@@ -6119,8 +6435,8 @@
         </p:nvSpPr>
         <p:spPr>
           <a:xfrm>
-            <a:off x="299100" y="5352916"/>
-            <a:ext cx="5888052" cy="584775"/>
+            <a:off x="299100" y="5291360"/>
+            <a:ext cx="5888052" cy="646331"/>
           </a:xfrm>
           <a:prstGeom prst="rect">
             <a:avLst/>
@@ -6134,7 +6450,7 @@
           <a:lstStyle/>
           <a:p>
             <a:r>
-              <a:rPr lang="ru-RU" sz="1600" b="1" dirty="0">
+              <a:rPr lang="ru-RU" b="1" dirty="0">
                 <a:ea typeface="Verdana" panose="020B0604030504040204" pitchFamily="34" charset="0"/>
               </a:rPr>
               <a:t>Дипломный руководитель</a:t>
@@ -6142,12 +6458,12 @@
           </a:p>
           <a:p>
             <a:r>
-              <a:rPr lang="ru-RU" sz="1600" dirty="0">
+              <a:rPr lang="ru-RU" dirty="0">
                 <a:ea typeface="Verdana" panose="020B0604030504040204" pitchFamily="34" charset="0"/>
               </a:rPr>
               <a:t>Старостина Вера Валерьевна</a:t>
             </a:r>
-            <a:endParaRPr lang="ru-RU" sz="1600" dirty="0"/>
+            <a:endParaRPr lang="ru-RU" dirty="0"/>
           </a:p>
         </p:txBody>
       </p:sp>
@@ -6248,7 +6564,7 @@
     </p:spTree>
     <p:extLst>
       <p:ext uri="{BB962C8B-B14F-4D97-AF65-F5344CB8AC3E}">
-        <p14:creationId xmlns:p14="http://schemas.microsoft.com/office/powerpoint/2010/main" val="4250463745"/>
+        <p14:creationId xmlns:p14="http://schemas.microsoft.com/office/powerpoint/2010/main" val="1161532857"/>
       </p:ext>
     </p:extLst>
   </p:cSld>

--- a/презентация.pptx
+++ b/презентация.pptx
@@ -2231,7 +2231,7 @@
         </p:blipFill>
         <p:spPr bwMode="auto">
           <a:xfrm>
-            <a:off x="-5321830" y="303276"/>
+            <a:off x="-7846191" y="-1720766"/>
             <a:ext cx="3153132" cy="3153132"/>
           </a:xfrm>
           <a:prstGeom prst="rect">
